--- a/apps/api/src/main/resources/static/proposal/fleetmind-proposal-deck.pptx
+++ b/apps/api/src/main/resources/static/proposal/fleetmind-proposal-deck.pptx
@@ -1570,7 +1570,7 @@
           <a:p>
             <a:r>
               <a:rPr lang="en-US" dirty="0"/>
-              <a:t>[1:10–1:50] 兩個產出對應 30%+25% 硬分數；其餘三維度靠多耗油量估算、單服務架構、AI guardrail。</a:t>
+              <a:t>[1:10–1:50] 兩個產出：Dashboard 讓衰退看得見，預測模型讓代價算得出。兩者共用同一套確定性計算 —— 多耗油量估算、單服務架構、AI guardrail 都是從這個核心延伸出去的。</a:t>
             </a:r>
             <a:endParaRPr lang="en-US" dirty="0"/>
           </a:p>
@@ -2098,7 +2098,7 @@
           <a:p>
             <a:r>
               <a:rPr lang="en-US" dirty="0"/>
-              <a:t>[6:20–6:55] 主動揭露限制 = 誠信分。同時把『要什麼資料』講清楚，回應官方必含第 3 項與商務價值。</a:t>
+              <a:t>[6:20–6:55] 主動揭露限制是讓結論可信的前提。同時把『要什麼資料』講清楚：框架不變，餵更好的量測就能直接升級。</a:t>
             </a:r>
             <a:endParaRPr lang="en-US" dirty="0"/>
           </a:p>
@@ -3576,7 +3576,7 @@
                 <a:ea typeface="Hiragino Sans" pitchFamily="34" charset="-122"/>
                 <a:cs typeface="Hiragino Sans" pitchFamily="34" charset="-120"/>
               </a:rPr>
-              <a:t>失敗降級：Bedrock 不可用 → 該船快取簡報 → deterministic 模板；dashboard 與 55% 硬分數不受影響。開發全程以 Kiro 為 AI 助手。</a:t>
+              <a:t>失敗降級：Bedrock 不可用 → 該船快取簡報 → deterministic 模板；dashboard 與所有計算數字完全不受影響。開發全程以 Kiro 為 AI 助手。</a:t>
             </a:r>
             <a:endParaRPr lang="en-US" sz="1250" dirty="0"/>
           </a:p>
@@ -6929,7 +6929,7 @@
                 <a:ea typeface="Hiragino Sans" pitchFamily="34" charset="-122"/>
                 <a:cs typeface="Hiragino Sans" pitchFamily="34" charset="-120"/>
               </a:rPr>
-              <a:t>官方客觀評分標的</a:t>
+              <a:t>S21–S23 養護後遮蔽窗格</a:t>
             </a:r>
             <a:endParaRPr lang="en-US" sz="1150" dirty="0"/>
           </a:p>
@@ -7078,7 +7078,7 @@
                 <a:ea typeface="Hiragino Sans" pitchFamily="34" charset="-122"/>
                 <a:cs typeface="Hiragino Sans" pitchFamily="34" charset="-120"/>
               </a:rPr>
-              <a:t>兩條主線，直攻 55% 硬分數</a:t>
+              <a:t>兩條主線：看得見衰退，算得出代價</a:t>
             </a:r>
             <a:endParaRPr lang="en-US" sz="3000" dirty="0"/>
           </a:p>
@@ -7168,7 +7168,7 @@
                 <a:ea typeface="Hiragino Sans" pitchFamily="34" charset="-122"/>
                 <a:cs typeface="Hiragino Sans" pitchFamily="34" charset="-120"/>
               </a:rPr>
-              <a:t>客觀評分 25%</a:t>
+              <a:t>反事實預測</a:t>
             </a:r>
             <a:endParaRPr lang="en-US" sz="1100" dirty="0"/>
           </a:p>
@@ -7421,7 +7421,7 @@
                 <a:ea typeface="Hiragino Sans" pitchFamily="34" charset="-122"/>
                 <a:cs typeface="Hiragino Sans" pitchFamily="34" charset="-120"/>
               </a:rPr>
-              <a:t>專家品評 30%</a:t>
+              <a:t>效能診斷</a:t>
             </a:r>
             <a:endParaRPr lang="en-US" sz="1100" dirty="0"/>
           </a:p>
@@ -7623,7 +7623,7 @@
                 <a:ea typeface="Hiragino Sans" pitchFamily="34" charset="-122"/>
                 <a:cs typeface="Hiragino Sans" pitchFamily="34" charset="-120"/>
               </a:rPr>
-              <a:t>＋ 20% 商務決策價值（多耗油量反事實）　＋ 15% 技術可行性　＋ 10% AI 協作創意</a:t>
+              <a:t>兩者共用同一套確定性計算：多耗油量反事實、單服務可維運架構、AI 護欄，皆由此延伸</a:t>
             </a:r>
             <a:endParaRPr lang="en-US" sz="1350" dirty="0"/>
           </a:p>
@@ -10641,7 +10641,7 @@
                 <a:ea typeface="Hiragino Sans" pitchFamily="34" charset="-122"/>
                 <a:cs typeface="Hiragino Sans" pitchFamily="34" charset="-120"/>
               </a:rPr>
-              <a:t>官方必含（商務價值 20%）</a:t>
+              <a:t>商務決策價值</a:t>
             </a:r>
             <a:endParaRPr lang="en-US" sz="1200" dirty="0"/>
           </a:p>

--- a/apps/api/src/main/resources/static/proposal/fleetmind-proposal-deck.pptx
+++ b/apps/api/src/main/resources/static/proposal/fleetmind-proposal-deck.pptx
@@ -9899,7 +9899,7 @@
         <p:spPr>
           <a:xfrm>
             <a:off x="640080" y="1691640"/>
-            <a:ext cx="2148840" cy="1371600"/>
+            <a:ext cx="2057400" cy="1371600"/>
           </a:xfrm>
           <a:prstGeom prst="roundRect">
             <a:avLst>
@@ -9928,7 +9928,7 @@
         <p:spPr>
           <a:xfrm>
             <a:off x="777240" y="1828800"/>
-            <a:ext cx="1874520" cy="640080"/>
+            <a:ext cx="1783080" cy="640080"/>
           </a:xfrm>
           <a:prstGeom prst="rect">
             <a:avLst/>
@@ -9967,7 +9967,7 @@
         <p:spPr>
           <a:xfrm>
             <a:off x="777240" y="2487168"/>
-            <a:ext cx="1874520" cy="457200"/>
+            <a:ext cx="1783080" cy="457200"/>
           </a:xfrm>
           <a:prstGeom prst="rect">
             <a:avLst/>
@@ -10005,8 +10005,8 @@
         </p:nvSpPr>
         <p:spPr>
           <a:xfrm>
-            <a:off x="2971800" y="1691640"/>
-            <a:ext cx="2148840" cy="1371600"/>
+            <a:off x="2880360" y="1691640"/>
+            <a:ext cx="2057400" cy="1371600"/>
           </a:xfrm>
           <a:prstGeom prst="roundRect">
             <a:avLst>
@@ -10034,8 +10034,8 @@
         </p:nvSpPr>
         <p:spPr>
           <a:xfrm>
-            <a:off x="3108960" y="1828800"/>
-            <a:ext cx="1874520" cy="640080"/>
+            <a:off x="3017520" y="1828800"/>
+            <a:ext cx="1783080" cy="640080"/>
           </a:xfrm>
           <a:prstGeom prst="rect">
             <a:avLst/>
@@ -10073,8 +10073,8 @@
         </p:nvSpPr>
         <p:spPr>
           <a:xfrm>
-            <a:off x="3108960" y="2487168"/>
-            <a:ext cx="1874520" cy="457200"/>
+            <a:off x="3017520" y="2487168"/>
+            <a:ext cx="1783080" cy="457200"/>
           </a:xfrm>
           <a:prstGeom prst="rect">
             <a:avLst/>
@@ -10112,8 +10112,8 @@
         </p:nvSpPr>
         <p:spPr>
           <a:xfrm>
-            <a:off x="5303520" y="1691640"/>
-            <a:ext cx="2148840" cy="1371600"/>
+            <a:off x="5120640" y="1691640"/>
+            <a:ext cx="2057400" cy="1371600"/>
           </a:xfrm>
           <a:prstGeom prst="roundRect">
             <a:avLst>
@@ -10141,8 +10141,8 @@
         </p:nvSpPr>
         <p:spPr>
           <a:xfrm>
-            <a:off x="5440680" y="1828800"/>
-            <a:ext cx="1874520" cy="640080"/>
+            <a:off x="5257800" y="1828800"/>
+            <a:ext cx="1783080" cy="640080"/>
           </a:xfrm>
           <a:prstGeom prst="rect">
             <a:avLst/>
@@ -10180,8 +10180,8 @@
         </p:nvSpPr>
         <p:spPr>
           <a:xfrm>
-            <a:off x="5440680" y="2487168"/>
-            <a:ext cx="1874520" cy="457200"/>
+            <a:off x="5257800" y="2487168"/>
+            <a:ext cx="1783080" cy="457200"/>
           </a:xfrm>
           <a:prstGeom prst="rect">
             <a:avLst/>

--- a/apps/api/src/main/resources/static/proposal/fleetmind-proposal-deck.pptx
+++ b/apps/api/src/main/resources/static/proposal/fleetmind-proposal-deck.pptx
@@ -1570,7 +1570,7 @@
           <a:p>
             <a:r>
               <a:rPr lang="en-US" dirty="0"/>
-              <a:t>[1:10–1:50] 兩個產出對應 30%+25% 硬分數；其餘三維度靠多耗油量估算、單服務架構、AI guardrail。</a:t>
+              <a:t>[1:10–1:50] 兩個產出：Dashboard 讓衰退看得見，預測模型讓代價算得出。兩者共用同一套確定性計算 —— 多耗油量估算、單服務架構、AI guardrail 都是從這個核心延伸出去的。</a:t>
             </a:r>
             <a:endParaRPr lang="en-US" dirty="0"/>
           </a:p>
@@ -2098,7 +2098,7 @@
           <a:p>
             <a:r>
               <a:rPr lang="en-US" dirty="0"/>
-              <a:t>[6:20–6:55] 主動揭露限制 = 誠信分。同時把『要什麼資料』講清楚，回應官方必含第 3 項與商務價值。</a:t>
+              <a:t>[6:20–6:55] 主動揭露限制是讓結論可信的前提。同時把『要什麼資料』講清楚：框架不變，餵更好的量測就能直接升級。</a:t>
             </a:r>
             <a:endParaRPr lang="en-US" dirty="0"/>
           </a:p>
@@ -3576,7 +3576,7 @@
                 <a:ea typeface="Hiragino Sans" pitchFamily="34" charset="-122"/>
                 <a:cs typeface="Hiragino Sans" pitchFamily="34" charset="-120"/>
               </a:rPr>
-              <a:t>失敗降級：Bedrock 不可用 → 該船快取簡報 → deterministic 模板；dashboard 與 55% 硬分數不受影響。開發全程以 Kiro 為 AI 助手。</a:t>
+              <a:t>失敗降級：Bedrock 不可用 → 該船快取簡報 → deterministic 模板；dashboard 與所有計算數字完全不受影響。開發全程以 Kiro 為 AI 助手。</a:t>
             </a:r>
             <a:endParaRPr lang="en-US" sz="1250" dirty="0"/>
           </a:p>
@@ -6929,7 +6929,7 @@
                 <a:ea typeface="Hiragino Sans" pitchFamily="34" charset="-122"/>
                 <a:cs typeface="Hiragino Sans" pitchFamily="34" charset="-120"/>
               </a:rPr>
-              <a:t>官方客觀評分標的</a:t>
+              <a:t>S21–S23 養護後遮蔽窗格</a:t>
             </a:r>
             <a:endParaRPr lang="en-US" sz="1150" dirty="0"/>
           </a:p>
@@ -7078,7 +7078,7 @@
                 <a:ea typeface="Hiragino Sans" pitchFamily="34" charset="-122"/>
                 <a:cs typeface="Hiragino Sans" pitchFamily="34" charset="-120"/>
               </a:rPr>
-              <a:t>兩條主線，直攻 55% 硬分數</a:t>
+              <a:t>兩條主線：看得見衰退，算得出代價</a:t>
             </a:r>
             <a:endParaRPr lang="en-US" sz="3000" dirty="0"/>
           </a:p>
@@ -7168,7 +7168,7 @@
                 <a:ea typeface="Hiragino Sans" pitchFamily="34" charset="-122"/>
                 <a:cs typeface="Hiragino Sans" pitchFamily="34" charset="-120"/>
               </a:rPr>
-              <a:t>客觀評分 25%</a:t>
+              <a:t>反事實預測</a:t>
             </a:r>
             <a:endParaRPr lang="en-US" sz="1100" dirty="0"/>
           </a:p>
@@ -7421,7 +7421,7 @@
                 <a:ea typeface="Hiragino Sans" pitchFamily="34" charset="-122"/>
                 <a:cs typeface="Hiragino Sans" pitchFamily="34" charset="-120"/>
               </a:rPr>
-              <a:t>專家品評 30%</a:t>
+              <a:t>效能診斷</a:t>
             </a:r>
             <a:endParaRPr lang="en-US" sz="1100" dirty="0"/>
           </a:p>
@@ -7623,7 +7623,7 @@
                 <a:ea typeface="Hiragino Sans" pitchFamily="34" charset="-122"/>
                 <a:cs typeface="Hiragino Sans" pitchFamily="34" charset="-120"/>
               </a:rPr>
-              <a:t>＋ 20% 商務決策價值（多耗油量反事實）　＋ 15% 技術可行性　＋ 10% AI 協作創意</a:t>
+              <a:t>兩者共用同一套確定性計算：多耗油量反事實、單服務可維運架構、AI 護欄，皆由此延伸</a:t>
             </a:r>
             <a:endParaRPr lang="en-US" sz="1350" dirty="0"/>
           </a:p>
@@ -9899,7 +9899,7 @@
         <p:spPr>
           <a:xfrm>
             <a:off x="640080" y="1691640"/>
-            <a:ext cx="2148840" cy="1371600"/>
+            <a:ext cx="2057400" cy="1371600"/>
           </a:xfrm>
           <a:prstGeom prst="roundRect">
             <a:avLst>
@@ -9928,7 +9928,7 @@
         <p:spPr>
           <a:xfrm>
             <a:off x="777240" y="1828800"/>
-            <a:ext cx="1874520" cy="640080"/>
+            <a:ext cx="1783080" cy="640080"/>
           </a:xfrm>
           <a:prstGeom prst="rect">
             <a:avLst/>
@@ -9967,7 +9967,7 @@
         <p:spPr>
           <a:xfrm>
             <a:off x="777240" y="2487168"/>
-            <a:ext cx="1874520" cy="457200"/>
+            <a:ext cx="1783080" cy="457200"/>
           </a:xfrm>
           <a:prstGeom prst="rect">
             <a:avLst/>
@@ -10005,8 +10005,8 @@
         </p:nvSpPr>
         <p:spPr>
           <a:xfrm>
-            <a:off x="2971800" y="1691640"/>
-            <a:ext cx="2148840" cy="1371600"/>
+            <a:off x="2880360" y="1691640"/>
+            <a:ext cx="2057400" cy="1371600"/>
           </a:xfrm>
           <a:prstGeom prst="roundRect">
             <a:avLst>
@@ -10034,8 +10034,8 @@
         </p:nvSpPr>
         <p:spPr>
           <a:xfrm>
-            <a:off x="3108960" y="1828800"/>
-            <a:ext cx="1874520" cy="640080"/>
+            <a:off x="3017520" y="1828800"/>
+            <a:ext cx="1783080" cy="640080"/>
           </a:xfrm>
           <a:prstGeom prst="rect">
             <a:avLst/>
@@ -10073,8 +10073,8 @@
         </p:nvSpPr>
         <p:spPr>
           <a:xfrm>
-            <a:off x="3108960" y="2487168"/>
-            <a:ext cx="1874520" cy="457200"/>
+            <a:off x="3017520" y="2487168"/>
+            <a:ext cx="1783080" cy="457200"/>
           </a:xfrm>
           <a:prstGeom prst="rect">
             <a:avLst/>
@@ -10112,8 +10112,8 @@
         </p:nvSpPr>
         <p:spPr>
           <a:xfrm>
-            <a:off x="5303520" y="1691640"/>
-            <a:ext cx="2148840" cy="1371600"/>
+            <a:off x="5120640" y="1691640"/>
+            <a:ext cx="2057400" cy="1371600"/>
           </a:xfrm>
           <a:prstGeom prst="roundRect">
             <a:avLst>
@@ -10141,8 +10141,8 @@
         </p:nvSpPr>
         <p:spPr>
           <a:xfrm>
-            <a:off x="5440680" y="1828800"/>
-            <a:ext cx="1874520" cy="640080"/>
+            <a:off x="5257800" y="1828800"/>
+            <a:ext cx="1783080" cy="640080"/>
           </a:xfrm>
           <a:prstGeom prst="rect">
             <a:avLst/>
@@ -10180,8 +10180,8 @@
         </p:nvSpPr>
         <p:spPr>
           <a:xfrm>
-            <a:off x="5440680" y="2487168"/>
-            <a:ext cx="1874520" cy="457200"/>
+            <a:off x="5257800" y="2487168"/>
+            <a:ext cx="1783080" cy="457200"/>
           </a:xfrm>
           <a:prstGeom prst="rect">
             <a:avLst/>
@@ -10641,7 +10641,7 @@
                 <a:ea typeface="Hiragino Sans" pitchFamily="34" charset="-122"/>
                 <a:cs typeface="Hiragino Sans" pitchFamily="34" charset="-120"/>
               </a:rPr>
-              <a:t>官方必含（商務價值 20%）</a:t>
+              <a:t>商務決策價值</a:t>
             </a:r>
             <a:endParaRPr lang="en-US" sz="1200" dirty="0"/>
           </a:p>

--- a/apps/api/src/main/resources/static/proposal/fleetmind-proposal-deck.pptx
+++ b/apps/api/src/main/resources/static/proposal/fleetmind-proposal-deck.pptx
@@ -778,7 +778,26 @@
           <a:p>
             <a:r>
               <a:rPr lang="en-US" dirty="0"/>
-              <a:t>[0:00–0:30] 開場：船舶推進效率隨時間衰退、油耗上升；養護能恢復但決策靠經驗。FleetMind 把它變成可計算、可解釋、人可拍板的決策支援。一句話定位：數字來自計算，語言來自 AI，決策留給人。</a:t>
+              <a:t>[0:00–0:30] 開場
+講：船舶推進效率隨時間衰退、油耗上升；養護能恢復，但「何時做」靠經驗。
+FleetMind 把它變成可計算、可解釋、人可拍板的決策支援。
+定位句（整場回扣兩次）：「數字來自計算，語言來自 AI，決策留給人。」
+──────── 全場地圖（12 分鐘：8 報告 + 4 Q&amp;A） ────────
+ P1  0:00 開場定位          P7  4:25 誠實：baseline 勝出
+ P2  0:30 痛點 + 資料規模    P8  5:25 多耗油噸數（不談金額）
+ P3  1:10 兩條主線          P9  6:20 限制 + 想要的資料
+ P4  1:50 方法 k=FOC/STW³   P10 6:55 架構
+ P5  2:35 ★ LIVE DEMO ←唯一離開投影片的一分鐘
+ P6  3:35 UWI 誠信          P11 7:35 收尾 → Q&amp;A
+ P12–P16 = Q&amp;A 備援頁，被問到才翻（見各頁備忘稿）
+──────── 上台前 10 分鐘（缺一不可） ────────
+1. 開四個分頁，全在 http://fleetmind-alb-330672315.us-east-1.elb.amazonaws.com
+   ①/proposal.html（本簡報）②/dashboard.html（demo）③/deck.html（架構深水區）④/architecture.html
+2. ★ 在 /dashboard.html 選 S11，按一次「生成 AI 決策簡報」，等它回來。
+   這一發是冷的、要 13.5 秒；預熱後台上那發只要 8 秒。不預熱＝觀眾替你付這 13.5 秒，
+   而前端 15 秒就放棄 → 簡報可能整個拿不到。
+3. 確認 S11 = 21.8%、紅燈「已超門檻」。讀不到數字 → 走演練 B（見 P5 備忘稿）。
+超時處置：講完 P8（5:25 那頁）若已過 6:30，直接跳 P11 收尾。寧可少講兩頁。</a:t>
             </a:r>
             <a:endParaRPr lang="en-US" dirty="0"/>
           </a:p>
@@ -866,7 +885,16 @@
           <a:p>
             <a:r>
               <a:rPr lang="en-US" dirty="0"/>
-              <a:t>[6:55–7:35] 架構一句話：單服務同源、AWS-only、AI 有 guardrail 不亂編。回應官方第 4、5 項。</a:t>
+              <a:t>[6:55–7:35] 架構
+一句話：單服務同源、AWS-only、AI 有護欄不亂編。回應官方要求的第 4、5 項
+（AI 與 AWS 服務扮演的角色）。
+三個點：
+ · ECS Fargate (ARM64) 單一容器同時服務看板與 REST API —— 一個部署單元
+ · 請求路徑上沒有資料存放層：指標離線算完烤進映像，冷啟即有真資料、零外部相依
+ · Bedrock 只負責語言，數字全部來自 core-calc；護欄比對每個數字的引用，對不上整篇打回
+★ 不要把設計講成現況。CloudFront/WAF/Cognito/多區域今天都沒有，
+ 圖上是灰虛線，講的時候也照講。旁邊就是 live URL，評審 curl 一下就知道。
+被追問架構 → 分頁③ /deck.html（18 頁）或分頁④ /architecture.html（可點開放大讀 ARN）。</a:t>
             </a:r>
             <a:endParaRPr lang="en-US" dirty="0"/>
           </a:p>
@@ -954,7 +982,22 @@
           <a:p>
             <a:r>
               <a:rPr lang="en-US" dirty="0"/>
-              <a:t>[7:35–8:00] 收尾：三個交付一句話帶過，回到定位句，進 Q&amp;A。</a:t>
+              <a:t>[7:35–8:00] 收尾
+三個交付各一句，不要展開：
+ · Speed Loss Dashboard —— 衰退看得見
+ · 油耗預測模型 —— 102 格 1:1，代價算得出
+ · Live 系統 —— 網址就在上面，現在就可以打開
+回到定位句收：「數字來自計算，語言來自 AI，決策留給人。」
+然後停。把時間留給 Q&amp;A（4 分鐘、統問統答）。
+Q&amp;A 路由：
+ 資料/方法/ISO/洩漏 → P12–P16 備援頁（各頁備忘稿有深度答案）
+ 架構/為何不用 Serverless → 分頁③ /deck.html 或分頁④ /architecture.html
+ 資安/權限 → /architecture.html#security（已實作與規劃中分開標）
+ 多區域/災備 → /architecture.html#activeactive（那是設計不是現況）
+ 「數字哪來的」 → 直接回 dashboard 點引用，跳回 API
+答不出來時的誠信收尾句：
+「正午報表粒度下這是最誠實的做法；給我們軸功率／對水速度計資料，
+ 框架直接升級 ISO 19030 全合規。」</a:t>
             </a:r>
             <a:endParaRPr lang="en-US" dirty="0"/>
           </a:p>
@@ -1042,7 +1085,23 @@
           <a:p>
             <a:r>
               <a:rPr lang="en-US" dirty="0"/>
-              <a:t/>
+              <a:t>Q&amp;A 備援 · 資料與方法（被問到才翻到這頁）
+【4 分鐘 Q&amp;A 是統問統答】評審一次問完，我們分工接。不確定 → 用誠信收尾句（見下）。
+■ 訓練/預測怎麼切
+訓練船 S1–S12 全可見；預測船 S21–S23 在養護後區間被遮蔽。
+船型 W1（S1–S8 + S21）、W2（S9–S12 + S22–S23）——同設計姊妹船、不同航線。
+■ 若追問「event_day 是什麼」
+官方資料 v2 把 maintenance.csv 從 event_date（日曆）改成 event_day（相對天數，
+與日報 NOON_UTC 同軸）。所以 (ship_id, event_day) 直接 join，anchor 難題消失。
+這是 7/14 官方重釋出的，我們跟著改了。
+■ 若追問「為什麼不用 SOG」
+兩欄都 100% 填充，但洋流讓兩者可有明顯差異。阻力物理一律 STW，距離/營運才用 SOG。
+殘差顯性標成「未解釋」，不塞進污損。
+■ 102 格的分布（被問到細節時才報）
+HSHFO 91 格、VLSFO 11 格；S21=43、S22=24、S23=35。
+■ 誠信收尾句（答不出來時統一用這句）
+「正午報表粒度下這是最誠實的做法；給我們軸功率／對水速度計資料，
+ 框架直接升級 ISO 19030 全合規。」</a:t>
             </a:r>
             <a:endParaRPr lang="en-US" dirty="0"/>
           </a:p>
@@ -1130,7 +1189,26 @@
           <a:p>
             <a:r>
               <a:rPr lang="en-US" dirty="0"/>
-              <a:t/>
+              <a:t>Q&amp;A 備援 · 預測模型（25% 是這一項，程式自動評分）
+■ 這題最容易被追殺：「為什麼不上 SageMaker / 深度學習？」
+誠實講三個理由，順序不要換：
+ ① ISO 19030 本身就是確定性方法，不是學出來的。
+ ② 篩選後每船合格樣本太少，硬煉大模型會過擬合。
+ ③ 我們真的試過更複雜的堆疊與單調約束——在防漏驗證上沒贏過樸素 GBM baseline。
+「簡單是裁決過的，不是不會做。不 ship 比 baseline 差的模型，是原則。」
+■ 特徵清單（被問到才報，不要主動背）
+STW / STW³ / RPM / 滑差 · 吃水載況 · 風浪湧與水溫 · 污損時鐘（距上次船殼介入天數、
+距上次螺旋槳介入天數、水溫×天數的積溫＝生物污損壓力 proxy）· 船型 W1/W2 ·
+燃料類型 + 熱值 LCV · HOURS_FULL_SPEED。
+■ 「污損時鐘」是整個模型最關鍵的設計
+UWI（純檢查、不清不拋）事件不重置時鐘。所以模型不會在一次純檢查後幻覺出恢復。
+這正是官方明示提示要的能力——見 P15 那頁。
+■ 若追問洩漏（Q7 級）
+H 類主機性能欄位（SFOC / 馬力 / 推力）在預測窗本來就是 HIDDEN，我們不會也不能用。
+ME_AVG_RPM 屬 A 類、預測窗可見——它是當日真實觀測的運轉條件，不是油耗的代理答案。
+這個使用邊界我們也列進給主辦的問題清單，想跟貴司確認。
+■ 數字
+RMSE 3.51 MT / MAPE 5.22% / 102 格 1:1 提交。</a:t>
             </a:r>
             <a:endParaRPr lang="en-US" dirty="0"/>
           </a:p>
@@ -1218,7 +1296,29 @@
           <a:p>
             <a:r>
               <a:rPr lang="en-US" dirty="0"/>
-              <a:t/>
+              <a:t>Q&amp;A 備援 · Speed Loss / ISO 19030（30% 是這一項，陽明專家品評）
+■ 這頁的評審裡有海事／輪機專家。不要宣稱全合規，先自己講偏離。
+偏離 ISO 19030 的四點，主動報：
+ ① 正午報表是 SOG 粒度，非 ISO 要的對水速度計 → 洋流是系統性偏差
+ ② 無軸功率，k = FOC/STW³ 只是 performance value 的代理
+ ③ 正午粒度（一天一筆），非 ISO 的高頻量測
+ ④ 無完整天候修正
+「骨架照 ISO：定參考基準期、控速度帶、看 performance value 隨時間偏移。
+ 拿不到的量測我們就說拿不到，不假裝。」
+■ 「全隊都降速了，你怎麼分商業減速與污損？」← 專家最愛問這題
+從不比原始 FOC 或原始航速。k = FOC/STW³ 先把速度正規化，而且只在 ±1 kn 同速帶內比 k；
+速度偏離會自動降低信心等級。基準期取每次事件後首 10–15 個合格日、上限 60 個日曆天，
+避免再生長把基準灌水。減速改變的是 V，在這些控制下不改變 k。
+■ 「Speed Loss % 這數字可信嗎？」
+段內對 k 做 Theil-Sen 穩健迴歸（抗離群）。UI 主 KPI 顯示「3.5%（±0.8）· 中信心 · n=12」，
+不是假精確的 3.47%。未解釋殘差一定顯示、不藏。
+量級合理性：正常約 2–10%。畫得出 40% 的隊，數字就是壞的。
+■ 歸因退回 50/50 時要主動講
+「因區段不足，暫用預設分攤」會標在卡片上。這是資料限制不是方法漏洞——
+有貴司的 UWC/PP 恢復幅度紀錄當 ground truth，就能校準。
+■ 誠信收尾句
+「正午報表粒度下這是最誠實的做法；給我們軸功率／對水速度計資料，
+ 框架直接升級 ISO 19030 全合規。」</a:t>
             </a:r>
             <a:endParaRPr lang="en-US" dirty="0"/>
           </a:p>
@@ -1306,7 +1406,35 @@
           <a:p>
             <a:r>
               <a:rPr lang="en-US" dirty="0"/>
-              <a:t/>
+              <a:t>Q&amp;A 備援 · UWI 判讀 · 商務價值
+★★ 這頁有一條紅線：不准報金額。★★
+docs/27 記錄陽明工程師的明確要求：ROI／成本不用算——成本是別部門管的，
+他們只負責「發現問題、通知需要清洗」。台上報金額 = 當著提出這要求的人打臉。
+只給噸數。要換算，請他們自己乘當期油價：「每港每次加油都不同，我們不假裝知道。」
+■ 「清了為什麼沒改善？你們的圖是不是有問題？」← 幾乎必問
+不是問題，是發現。官方明示提示自己也講了：純檢查（UWI）不該帶來改善。
+關鍵是講清楚兩個地方、兩種角色，這句話要背起來：
+ · 預測模型裡 → 物理先驗的家。污損時鐘在 UWI 事件不重置，
+   所以模型不會在純檢查後幻覺出一段恢復。這正是官方要的。
+ · Dashboard 裡 → 呈現實測 k 變化 + 信心旗標，
+   不宣稱「UWI = 零變化」。
+S11 的 recovery_pct = −4.62% 就是照實顯示。
+■ 追問：「那你的圖在某些 UWI 上還是有變化，不是自相矛盾？」
+不矛盾。真資料上多數 UWI 事件量到的 k 變化仍超過噪音門檻——可能是季節、載況、洋流，
+或那次檢查其實伴隨了未記錄的小動作。所以 dashboard 老實呈現「量到的 delta + 信心」，
+讓專家自己判讀，不硬壓成零。
+「把統計實測（會有雜訊）和物理先驗（乾淨）分開處理，是刻意的設計，不是打架。」
+■ 「能幫我省多少錢？」
+「我們刻意不出金額。」→ 講反事實：把污損時鐘歸零重新預測，
+S23 同航速下每天多耗約 16.4 MT（粗估、非正式數字，HIGH 信心 · n=506）。
+「換算成本請用貴司當期實際油價。每個噸數都可回溯到計算。」
+■ 「AI 會自己排清潔嗎？」
+不會。決策支援，人拍板。分級建議：
+ 低信心 → 先做水下檢查（最便宜的資訊採購）
+ 高信心且污損歸因明確 → 建議排清潔
+ 否則 → 持續觀察
+「我們永遠不會說『模型叫你清』，而是把證據、信心、歸因攤在你面前，由輪機主管拍板。」
+門檻可調（/api/config/threshold），通道可換（SNS/SES）。</a:t>
             </a:r>
             <a:endParaRPr lang="en-US" dirty="0"/>
           </a:p>
@@ -1394,7 +1522,38 @@
           <a:p>
             <a:r>
               <a:rPr lang="en-US" dirty="0"/>
-              <a:t/>
+              <a:t>Q&amp;A 備援 · AI · AWS · 限制
+★ 紅線：不要把設計講成現況。旁邊就是 live URL，評審 curl 一下就知道。★
+今天真的在跑的只有七個：ALB · ECS Fargate · ECR · Bedrock · SNS · SES v2 · CloudWatch。
+CloudFront / WAF / Cognito / 私有子網 / NAT / S3 / DynamoDB / 多區域 —— 今天全都沒有，
+每一項都用 boto3 探測過、讀回 0。圖上是灰色虛線，講的時候也照這樣講。
+■ 「架構長怎樣？」
+單一 Spring Boot 容器跑 ECS Fargate（ARM64）+ ALB + ECR + Bedrock + SNS/SES + CloudWatch。
+region us-east-1、帳號 516665228894。
+最關鍵也最不尋常的一點：請求路徑上沒有任何資料存放層。
+指標由 core-calc 離線算完，real-metrics.json 在 build 時烤進映像 → 容器冷啟即持有真資料、
+零外部資料相依。（這也正是多區域今天做不了的原因：沒有外置狀態，就沒有東西可以跨區複製。）
+要看細節 → 分頁③ /deck.html（18 頁）或分頁④ /architecture.html。
+■ 「成本多少？」
+不談月費金額（依 docs/27，成本不是本案主線）。只講質性：ARM64 Fargate 常駐成本低、
+免管 EC2/OS patch，全量重算不到一分鐘，擴到近百艘架構不變。
+■ 「為什麼不上 SageMaker？」→ 同 P13 備忘稿的三個理由。
+■ 「AI 怎麼防它亂編數字？」
+「數字來自計算，語言來自 AI，決策留給人。」
+Bedrock 上的 Claude 只解讀已經算好的指標。護欄逐一比對簡報裡每個數字與它引用的 metric，
+對不上就整篇打回、走降級階梯。它無法發明數字。
+簡報裡每個數字可點回產生它的 API —— demo 時就展示過了。
+開發階段用 Kiro 當 AI 開發工具。
+■ 資安被問到 → /architecture.html#security（已實作與規劃中是分開標的）
+不要宣稱「全面最小權限」。真相：IAM 動作有收斂（只有 InvokeModel，不是 bedrock:*）、
+SNS 綁單一 topic ARN，但 Bedrock 與 SES 仍是 Resource: *。圖上就是這樣標的，照講。
+兩個角色分離（task vs execution）才是真的最小權限成果：應用永遠不能拉映像或碰 log group。
+■ 多區域被問到 → /architecture.html#activeactive，那是設計不是現況
+而且這個比賽帳號根本做不了：ap-northeast-1 的 ECS/ECR 直接回 AccessDenied（已探測）。
+■ 「最大的限制？」主動講，不要等問
+①SOG 非對水速度、洋流是系統偏差 ②無軸功率、k 是代理 ③歸因區段稀疏時退回標記過的 50/50
+④UWI 事件在真資料上仍有超噪音變化，我們呈現而非壓平。
+「主動揭露限制，是讓結論可信的前提。」</a:t>
             </a:r>
             <a:endParaRPr lang="en-US" dirty="0"/>
           </a:p>
@@ -1482,7 +1641,13 @@
           <a:p>
             <a:r>
               <a:rPr lang="en-US" dirty="0"/>
-              <a:t>[0:30–1:10] 點出痛點：污損偷油、養護決策靠經驗。用真資料規模帶出我們有本錢做量化。</a:t>
+              <a:t>[0:30–1:10] 痛點 + 資料規模
+講：船殼與螺旋槳污損讓同樣航速要燒更多油。船東靠水下清潔（UWC）與拋光（PP）恢復效能，
+但「何時做、值不值得」目前多憑經驗，缺乏可量化、可歸因、可回溯的依據。
+四張卡不要逐一唸，只點兩個：
+ · 「15 艘船、5 年、21,282 列日報 + 77 筆養護事件」→ 我們有本錢做量化，不是玩具資料。
+ · 「Speed Loss 全隊 −12% ~ +22%」→ 這個跨度就是問題本身：有的剛養護、有的重度污損。
+頁尾那句唸出來會加分：「資料由命題企業提供，僅存於競賽 AWS 帳號、不進版控、賽後刪除。」</a:t>
             </a:r>
             <a:endParaRPr lang="en-US" dirty="0"/>
           </a:p>
@@ -1570,7 +1735,12 @@
           <a:p>
             <a:r>
               <a:rPr lang="en-US" dirty="0"/>
-              <a:t>[1:10–1:50] 兩個產出：Dashboard 讓衰退看得見，預測模型讓代價算得出。兩者共用同一套確定性計算 —— 多耗油量估算、單服務架構、AI guardrail 都是從這個核心延伸出去的。</a:t>
+              <a:t>[1:10–1:50] 兩條主線
+講：兩個產出，一句話各帶過——
+ · Speed Loss Dashboard → 讓衰退看得見（ISO 19030 框架、船殼 vs 螺旋槳歸因、事件比對）
+ · 油耗預測模型 → 讓代價算得出（預測 102 格被遮蔽的全速油耗 + 反事實推論）
+關鍵是下一句：「兩者共用同一套確定性計算。」
+多耗油量估算、單服務架構、AI guardrail 都是從這個核心長出去的，不是三個獨立功能。</a:t>
             </a:r>
             <a:endParaRPr lang="en-US" dirty="0"/>
           </a:p>
@@ -1658,7 +1828,13 @@
           <a:p>
             <a:r>
               <a:rPr lang="en-US" dirty="0"/>
-              <a:t>[1:50–2:35] 方法核心：k=FOC/STW³ 把速度與洋流正規化，只在同速帶比 k，減速不會被誤記成污損。</a:t>
+              <a:t>[1:50–2:35] 方法 —— 這頁決定評審信不信你
+k = FOC ÷ STW³。慢慢講，這是全場的地基：
+ · 用對水速度 STW，不是對地速度 SOG → 洋流（黑潮那種）不會被誤記成效能變化
+ · 三次方 → 阻力物理；速度正規化掉，剩下的才是船況
+ · 只在 ±1 kn 同速帶內比 k → 商業減速改變的是 V，不改變 k
+如果只能講一句：「我們從不比原始油耗，也不比原始航速。」
+專家會在 Q&amp;A 追這題（見 P14 備忘稿）。</a:t>
             </a:r>
             <a:endParaRPr lang="en-US" dirty="0"/>
           </a:p>
@@ -1746,7 +1922,34 @@
           <a:p>
             <a:r>
               <a:rPr lang="en-US" dirty="0"/>
-              <a:t>[2:35–3:35] Demo（最長，實機操作）：真資料 15 船，點 S11（最嚴重、692 天沒清）看趨勢；再點 S23 看歸因。強調數字全來自 core-calc 確定性計算。</a:t>
+              <a:t>[2:35–3:35] ★ LIVE DEMO — 全場唯一離開投影片的一分鐘
+切到分頁②：http://fleetmind-alb-330672315.us-east-1.elb.amazonaws.com/dashboard.html
+只點這三下。每一下先講「我要證明什麼」，再點。不要即興、不要多點。
+① 排名表點 S11
+   「15 艘裡最嚴重：速度損失 21.8%、信心 HIGH、已超 10% 門檻、692 天沒清洗。」
+   失敗：表沒出來 → 演練 B。
+② 看趨勢 ＋ 事件標記線
+   「五年慢慢爬上來，撞到門檻。這條垂直線是水下事件——清了，但 k 沒有降回去，
+    恢復率 −4.62%。」
+   「這不是我們的圖有問題，這是發現。官方也明示：純檢查（UWI）本就不該帶來改善。」
+   失敗：圖沒出來 → 講這段話，跳③。
+③ 按「生成 AI 決策簡報」← 最有價值也最脆弱，它真的在打 Bedrock
+   按下去之後立刻接著講：「數字不是 AI 掰的——每個數字都帶編號上標引用，
+    點下去會跳回產生它的 API。」講完它剛好回來。
+   ★ 不要盯著轉圈等。實測：預熱過 8 秒／沒預熱 13.5 秒，兩種都會回來。
+   ★ 轉圈不是故障訊號，畫面自己跳出「AI 簡報暫不可用」才是。
+     最大的風險是你以為壞了、手癢去按「離線備援」，親手把最好的一刻換成英文版。
+回扣：「數字全部來自 core-calc 的確定性計算；AI 只負責把它說成人話。」
+──────── 演練 A：真的回不來（畫面出現錯誤訊息） ────────
+不要重按。講：「這裡有降級階梯：Bedrock → 護欄驗證 → 快取 last-good → 決定性 fallback。
+走到哪一階都會有輸出，因為這條路徑設計成不能開天窗。」然後按「離線備援」。
+這不是掩飾，這就是設計——講出來反而加分。
+──────── 演練 B：全站掛掉／會場網路斷 ────────
+不要 debug。切回 /proposal.html，投影片是靜態 JPG。
+講：「Live demo 走不了，我用投影片講完，結束後歡迎到攤位實機看。」
+（前一晚先把 PPTX 下載到本機，斷網也能放。）
+對照船（被問到才講）：S23 8.9%、船殼歸因 96%、信心 HIGH ——「該排清洗」的乾淨案例。
+S11 是極端案例（692 天沒清）。</a:t>
             </a:r>
             <a:endParaRPr lang="en-US" dirty="0"/>
           </a:p>
@@ -1834,7 +2037,16 @@
           <a:p>
             <a:r>
               <a:rPr lang="en-US" dirty="0"/>
-              <a:t>[3:35–4:25] 這頁是誠信亮點。把物理先驗（模型時鐘不重置）和統計實測（dashboard 顯示雜訊）分開，準備好回答『你模型說 UWI 不改善但圖上有變化』。</a:t>
+              <a:t>[3:35–4:25] UWI 誠信 —— 全場最能拿分的一頁
+剛剛 demo 才看到「清了但 k 沒降回去」，趁熱講這頁。
+官方明示提示：資料裡有一類事件是純檢查、無實體介入（UWI），
+好的模型應辨識這類事件不該帶來效能改善，而不是把「養護後」一律當「變好」。
+「官方認證我們這個方向是對的。」
+我們的做法是兩個地方、兩種角色（這句要背）：
+ · 預測模型裡 → 污損時鐘在 UWI 事件不重置 ← 物理先驗的家
+ · Dashboard 裡 → 誠實顯示實測 delta + 信心，不宣稱「UWI = 零變化」
+「把統計實測（會有雜訊）和物理先驗（乾淨）分開處理，是刻意的設計。」
+評審一定會追問「那你圖上為什麼有變化」→ P15 備忘稿有完整答法。</a:t>
             </a:r>
             <a:endParaRPr lang="en-US" dirty="0"/>
           </a:p>
@@ -1922,7 +2134,15 @@
           <a:p>
             <a:r>
               <a:rPr lang="en-US" dirty="0"/>
-              <a:t>[4:25–5:25] 誠實：baseline 勝出。強調防漏驗證的嚴謹（模擬真實遮蔽），這是評審會追問的點。</a:t>
+              <a:t>[4:25–5:25] 誠實 —— baseline 勝出
+三個數字：RMSE 3.51 MT · MAPE 5.22% · 102/102 格 1:1 提交。
+這頁的價值不在數字，在右邊那張「刻意的簡單」：
+「我們試過更複雜的堆疊與單調約束——在防漏驗證上都沒贏過樸素 GBM baseline，
+ 於是資料驅動地選 baseline。不 ship 比 baseline 差的模型，是原則，不是能力上限。」
+防漏驗證要講，這是評審會追的：
+「我們不用隨機 K-fold。在可見船上模擬真實遮蔽——挑真養護事件後的合格日窗把答案藏起來，
+ 只用可見特徵預測、逐窗評分。等於把預測船會遇到的難處，在有答案的船上重演一次。
+ 另外跑 GroupKFold(by ship) 確認跨船遷移不是靠記住單船。」</a:t>
             </a:r>
             <a:endParaRPr lang="en-US" dirty="0"/>
           </a:p>
@@ -2010,7 +2230,17 @@
           <a:p>
             <a:r>
               <a:rPr lang="en-US" dirty="0"/>
-              <a:t>[5:25–6:20] 主打 S23（HIGH 信心、船殼 96%）：同航速下每天多耗約 16.4 MT。S11 是極端案例。刻意不出金額——貴司工程師講明成本是別部門的事，我們只負責發現問題、通知該清洗；油價每港每次都不同，要換算自行乘上當期油價即可。強調人在迴路、數字可回溯。</a:t>
+              <a:t>[5:25–6:20] 多耗油噸數 —— ★ 這頁有紅線：不准報金額 ★
+主打 S23（HIGH 信心、船殼歸因 96%、n=506）：同航速下每天多耗約 16.4 MT。
+S11 是極端案例（692 天沒清）。
+刻意不出金額，而且要把理由講出來——這是加分不是扣分：
+「貴司工程師講得很清楚：成本是別部門管的，你們要的是『發現問題、通知該清洗』。
+ 所以我們只給物理量。要換算成本，用貴司當期實際油價乘上去即可——
+ 每港每次加油都不同，我們不假裝知道。」
+反事實怎麼來的：同一個預測模型，把船殼／螺旋槳的污損時鐘歸零重新預測，
+差值就是「現在做 UWC／PP，同航速下每天少燒多少」。標了「粗估 · 非正式數字」。
+收尾：「人在迴路，每個噸數都可回溯到計算。」
+★ 超時檢查點：講完這頁若已過 6:30 → 直接跳 P11 收尾。</a:t>
             </a:r>
             <a:endParaRPr lang="en-US" dirty="0"/>
           </a:p>
@@ -2098,7 +2328,19 @@
           <a:p>
             <a:r>
               <a:rPr lang="en-US" dirty="0"/>
-              <a:t>[6:20–6:55] 主動揭露限制是讓結論可信的前提。同時把『要什麼資料』講清楚：框架不變，餵更好的量測就能直接升級。</a:t>
+              <a:t>[6:20–6:55] 限制 + 想要的資料
+「主動揭露限制，是讓結論可信的前提。」——這句先講，再列。
+四點限制（不要念稿，挑兩點講）：
+ ①正午報表是 SOG、非 ISO 要的對水速度 → 洋流是系統性偏差
+ ②無軸功率，k 是 FOC/STW³ 的代理
+ ③船殼/螺旋槳歸因在區段稀疏時退回標記過的 50/50
+ ④UWI 事件在真資料上仍有超噪音的量測變化——我們呈現，不壓平
+想要的資料（這是官方命題明列要我們回答的一項，別漏）：
+軸功率計與對水速度計（直接升級 ISO 19030 全合規）、進塢後海試曲線（更準的參考基準）、
+antifouling 塗層年限、吃水俯仰 trim、航線與港口。
+以及貴司自己的 UWC/PP 效能恢復幅度紀錄——那能把我們的歸因與反事實
+從「合理估計」校準成「有 ground truth 背書」。
+收尾：「方法框架不用改，餵進更好的量測就直接升級。」</a:t>
             </a:r>
             <a:endParaRPr lang="en-US" dirty="0"/>
           </a:p>

--- a/apps/api/src/main/resources/static/proposal/fleetmind-proposal-deck.pptx
+++ b/apps/api/src/main/resources/static/proposal/fleetmind-proposal-deck.pptx
@@ -2713,12 +2713,20 @@
           <a:chExt cx="0" cy="0"/>
         </a:xfrm>
       </p:grpSpPr>
-      <p:sp>
-        <p:nvSpPr>
-          <p:cNvPr id="2" name="Shape 0"/>
-          <p:cNvSpPr/>
-          <p:nvPr/>
-        </p:nvSpPr>
+      <p:pic>
+        <p:nvPicPr>
+          <p:cNvPr id="2" name="Image 0" descr="/Users/fengchihsheng/Documents/AI_work/fleetmind-yang-ming-hackathon/presentation/img/cover-ship-dusk.jpg">    </p:cNvPr>
+          <p:cNvPicPr>
+            <a:picLocks noChangeAspect="1"/>
+          </p:cNvPicPr>
+          <p:nvPr/>
+        </p:nvPicPr>
+        <p:blipFill>
+          <a:blip r:embed="rId1"/>
+          <a:stretch>
+            <a:fillRect/>
+          </a:stretch>
+        </p:blipFill>
         <p:spPr>
           <a:xfrm>
             <a:off x="0" y="0"/>
@@ -2727,15 +2735,33 @@
           <a:prstGeom prst="rect">
             <a:avLst/>
           </a:prstGeom>
+        </p:spPr>
+      </p:pic>
+      <p:sp>
+        <p:nvSpPr>
+          <p:cNvPr id="3" name="Shape 0"/>
+          <p:cNvSpPr/>
+          <p:nvPr/>
+        </p:nvSpPr>
+        <p:spPr>
+          <a:xfrm>
+            <a:off x="0" y="0"/>
+            <a:ext cx="12191695" cy="6858000"/>
+          </a:xfrm>
+          <a:prstGeom prst="rect">
+            <a:avLst/>
+          </a:prstGeom>
           <a:solidFill>
-            <a:srgbClr val="0A2540"/>
+            <a:srgbClr val="0A2540">
+              <a:alpha val="58000"/>
+            </a:srgbClr>
           </a:solidFill>
           <a:ln/>
         </p:spPr>
       </p:sp>
       <p:sp>
         <p:nvSpPr>
-          <p:cNvPr id="3" name="Shape 1"/>
+          <p:cNvPr id="4" name="Shape 1"/>
           <p:cNvSpPr/>
           <p:nvPr/>
         </p:nvSpPr>
@@ -2748,14 +2774,16 @@
             <a:avLst/>
           </a:prstGeom>
           <a:solidFill>
-            <a:srgbClr val="12385C"/>
+            <a:srgbClr val="12385C">
+              <a:alpha val="78000"/>
+            </a:srgbClr>
           </a:solidFill>
           <a:ln/>
         </p:spPr>
       </p:sp>
       <p:sp>
         <p:nvSpPr>
-          <p:cNvPr id="4" name="Text 2"/>
+          <p:cNvPr id="5" name="Text 2"/>
           <p:cNvSpPr/>
           <p:nvPr/>
         </p:nvSpPr>
@@ -2794,7 +2822,7 @@
       </p:sp>
       <p:sp>
         <p:nvSpPr>
-          <p:cNvPr id="5" name="Text 3"/>
+          <p:cNvPr id="6" name="Text 3"/>
           <p:cNvSpPr/>
           <p:nvPr/>
         </p:nvSpPr>
@@ -2856,7 +2884,7 @@
       </p:sp>
       <p:sp>
         <p:nvSpPr>
-          <p:cNvPr id="6" name="Text 4"/>
+          <p:cNvPr id="7" name="Text 4"/>
           <p:cNvSpPr/>
           <p:nvPr/>
         </p:nvSpPr>
@@ -2881,7 +2909,7 @@
             <a:r>
               <a:rPr lang="en-US" sz="1900" dirty="0">
                 <a:solidFill>
-                  <a:srgbClr val="2A9D8F"/>
+                  <a:srgbClr val="6FE7CF"/>
                 </a:solidFill>
                 <a:latin typeface="Hiragino Sans" pitchFamily="34" charset="0"/>
                 <a:ea typeface="Hiragino Sans" pitchFamily="34" charset="-122"/>
@@ -2895,7 +2923,7 @@
       </p:sp>
       <p:sp>
         <p:nvSpPr>
-          <p:cNvPr id="7" name="Text 5"/>
+          <p:cNvPr id="8" name="Text 5"/>
           <p:cNvSpPr/>
           <p:nvPr/>
         </p:nvSpPr>
@@ -2948,7 +2976,7 @@
       </p:sp>
       <p:sp>
         <p:nvSpPr>
-          <p:cNvPr id="8" name="Text 6"/>
+          <p:cNvPr id="9" name="Text 6"/>
           <p:cNvSpPr/>
           <p:nvPr/>
         </p:nvSpPr>
@@ -3856,9 +3884,55 @@
           <a:chExt cx="0" cy="0"/>
         </a:xfrm>
       </p:grpSpPr>
-      <p:sp>
-        <p:nvSpPr>
-          <p:cNvPr id="2" name="Shape 0"/>
+      <p:pic>
+        <p:nvPicPr>
+          <p:cNvPr id="2" name="Image 0" descr="/Users/fengchihsheng/Documents/AI_work/fleetmind-yang-ming-hackathon/presentation/img/horizon-dawn.jpg">    </p:cNvPr>
+          <p:cNvPicPr>
+            <a:picLocks noChangeAspect="1"/>
+          </p:cNvPicPr>
+          <p:nvPr/>
+        </p:nvPicPr>
+        <p:blipFill>
+          <a:blip r:embed="rId1"/>
+          <a:stretch>
+            <a:fillRect/>
+          </a:stretch>
+        </p:blipFill>
+        <p:spPr>
+          <a:xfrm>
+            <a:off x="0" y="0"/>
+            <a:ext cx="12191695" cy="6858000"/>
+          </a:xfrm>
+          <a:prstGeom prst="rect">
+            <a:avLst/>
+          </a:prstGeom>
+        </p:spPr>
+      </p:pic>
+      <p:sp>
+        <p:nvSpPr>
+          <p:cNvPr id="3" name="Shape 0"/>
+          <p:cNvSpPr/>
+          <p:nvPr/>
+        </p:nvSpPr>
+        <p:spPr>
+          <a:xfrm>
+            <a:off x="0" y="0"/>
+            <a:ext cx="12191695" cy="6858000"/>
+          </a:xfrm>
+          <a:prstGeom prst="rect">
+            <a:avLst/>
+          </a:prstGeom>
+          <a:solidFill>
+            <a:srgbClr val="0A2540">
+              <a:alpha val="82000"/>
+            </a:srgbClr>
+          </a:solidFill>
+          <a:ln/>
+        </p:spPr>
+      </p:sp>
+      <p:sp>
+        <p:nvSpPr>
+          <p:cNvPr id="4" name="Shape 1"/>
           <p:cNvSpPr/>
           <p:nvPr/>
         </p:nvSpPr>
@@ -3871,14 +3945,16 @@
             <a:avLst/>
           </a:prstGeom>
           <a:solidFill>
-            <a:srgbClr val="12385C"/>
+            <a:srgbClr val="12385C">
+              <a:alpha val="80000"/>
+            </a:srgbClr>
           </a:solidFill>
           <a:ln/>
         </p:spPr>
       </p:sp>
       <p:sp>
         <p:nvSpPr>
-          <p:cNvPr id="3" name="Text 1"/>
+          <p:cNvPr id="5" name="Text 2"/>
           <p:cNvSpPr/>
           <p:nvPr/>
         </p:nvSpPr>
@@ -3917,7 +3993,7 @@
       </p:sp>
       <p:sp>
         <p:nvSpPr>
-          <p:cNvPr id="4" name="Text 2"/>
+          <p:cNvPr id="6" name="Text 3"/>
           <p:cNvSpPr/>
           <p:nvPr/>
         </p:nvSpPr>
@@ -3979,7 +4055,7 @@
       </p:sp>
       <p:sp>
         <p:nvSpPr>
-          <p:cNvPr id="5" name="Text 3"/>
+          <p:cNvPr id="7" name="Text 4"/>
           <p:cNvSpPr/>
           <p:nvPr/>
         </p:nvSpPr>
@@ -4004,7 +4080,7 @@
             <a:r>
               <a:rPr lang="en-US" sz="1500" b="1" dirty="0">
                 <a:solidFill>
-                  <a:srgbClr val="2A9D8F"/>
+                  <a:srgbClr val="6FE7CF"/>
                 </a:solidFill>
                 <a:latin typeface="Hiragino Sans" pitchFamily="34" charset="0"/>
                 <a:ea typeface="Hiragino Sans" pitchFamily="34" charset="-122"/>
@@ -4018,7 +4094,7 @@
       </p:sp>
       <p:sp>
         <p:nvSpPr>
-          <p:cNvPr id="6" name="Text 4"/>
+          <p:cNvPr id="8" name="Text 5"/>
           <p:cNvSpPr/>
           <p:nvPr/>
         </p:nvSpPr>
@@ -4060,7 +4136,7 @@
       </p:sp>
       <p:sp>
         <p:nvSpPr>
-          <p:cNvPr id="7" name="Text 5"/>
+          <p:cNvPr id="9" name="Text 6"/>
           <p:cNvSpPr/>
           <p:nvPr/>
         </p:nvSpPr>
@@ -4085,7 +4161,7 @@
             <a:r>
               <a:rPr lang="en-US" sz="1500" b="1" dirty="0">
                 <a:solidFill>
-                  <a:srgbClr val="2A9D8F"/>
+                  <a:srgbClr val="6FE7CF"/>
                 </a:solidFill>
                 <a:latin typeface="Hiragino Sans" pitchFamily="34" charset="0"/>
                 <a:ea typeface="Hiragino Sans" pitchFamily="34" charset="-122"/>
@@ -4099,7 +4175,7 @@
       </p:sp>
       <p:sp>
         <p:nvSpPr>
-          <p:cNvPr id="8" name="Text 6"/>
+          <p:cNvPr id="10" name="Text 7"/>
           <p:cNvSpPr/>
           <p:nvPr/>
         </p:nvSpPr>
@@ -4141,7 +4217,7 @@
       </p:sp>
       <p:sp>
         <p:nvSpPr>
-          <p:cNvPr id="9" name="Text 7"/>
+          <p:cNvPr id="11" name="Text 8"/>
           <p:cNvSpPr/>
           <p:nvPr/>
         </p:nvSpPr>
@@ -4166,7 +4242,7 @@
             <a:r>
               <a:rPr lang="en-US" sz="1500" b="1" dirty="0">
                 <a:solidFill>
-                  <a:srgbClr val="2A9D8F"/>
+                  <a:srgbClr val="6FE7CF"/>
                 </a:solidFill>
                 <a:latin typeface="Hiragino Sans" pitchFamily="34" charset="0"/>
                 <a:ea typeface="Hiragino Sans" pitchFamily="34" charset="-122"/>
@@ -4180,7 +4256,7 @@
       </p:sp>
       <p:sp>
         <p:nvSpPr>
-          <p:cNvPr id="10" name="Text 8"/>
+          <p:cNvPr id="12" name="Text 9"/>
           <p:cNvSpPr/>
           <p:nvPr/>
         </p:nvSpPr>
@@ -4222,7 +4298,7 @@
       </p:sp>
       <p:sp>
         <p:nvSpPr>
-          <p:cNvPr id="11" name="Text 9"/>
+          <p:cNvPr id="13" name="Text 10"/>
           <p:cNvSpPr/>
           <p:nvPr/>
         </p:nvSpPr>
@@ -10850,9 +10926,55 @@
           <a:chExt cx="0" cy="0"/>
         </a:xfrm>
       </p:grpSpPr>
-      <p:sp>
-        <p:nvSpPr>
-          <p:cNvPr id="2" name="Text 0"/>
+      <p:pic>
+        <p:nvPicPr>
+          <p:cNvPr id="2" name="Image 0" descr="/Users/fengchihsheng/Documents/AI_work/fleetmind-yang-ming-hackathon/presentation/img/wake-exhaust.jpg">    </p:cNvPr>
+          <p:cNvPicPr>
+            <a:picLocks noChangeAspect="1"/>
+          </p:cNvPicPr>
+          <p:nvPr/>
+        </p:nvPicPr>
+        <p:blipFill>
+          <a:blip r:embed="rId1"/>
+          <a:stretch>
+            <a:fillRect/>
+          </a:stretch>
+        </p:blipFill>
+        <p:spPr>
+          <a:xfrm>
+            <a:off x="0" y="0"/>
+            <a:ext cx="12191695" cy="6858000"/>
+          </a:xfrm>
+          <a:prstGeom prst="rect">
+            <a:avLst/>
+          </a:prstGeom>
+        </p:spPr>
+      </p:pic>
+      <p:sp>
+        <p:nvSpPr>
+          <p:cNvPr id="3" name="Shape 0"/>
+          <p:cNvSpPr/>
+          <p:nvPr/>
+        </p:nvSpPr>
+        <p:spPr>
+          <a:xfrm>
+            <a:off x="0" y="0"/>
+            <a:ext cx="12191695" cy="6858000"/>
+          </a:xfrm>
+          <a:prstGeom prst="rect">
+            <a:avLst/>
+          </a:prstGeom>
+          <a:solidFill>
+            <a:srgbClr val="0A2540">
+              <a:alpha val="78000"/>
+            </a:srgbClr>
+          </a:solidFill>
+          <a:ln/>
+        </p:spPr>
+      </p:sp>
+      <p:sp>
+        <p:nvSpPr>
+          <p:cNvPr id="4" name="Text 1"/>
           <p:cNvSpPr/>
           <p:nvPr/>
         </p:nvSpPr>
@@ -10891,7 +11013,7 @@
       </p:sp>
       <p:sp>
         <p:nvSpPr>
-          <p:cNvPr id="3" name="Text 1"/>
+          <p:cNvPr id="5" name="Text 2"/>
           <p:cNvSpPr/>
           <p:nvPr/>
         </p:nvSpPr>
@@ -10930,7 +11052,7 @@
       </p:sp>
       <p:sp>
         <p:nvSpPr>
-          <p:cNvPr id="4" name="Text 2"/>
+          <p:cNvPr id="6" name="Text 3"/>
           <p:cNvSpPr/>
           <p:nvPr/>
         </p:nvSpPr>
@@ -10969,7 +11091,7 @@
       </p:sp>
       <p:sp>
         <p:nvSpPr>
-          <p:cNvPr id="5" name="Shape 3"/>
+          <p:cNvPr id="7" name="Shape 4"/>
           <p:cNvSpPr/>
           <p:nvPr/>
         </p:nvSpPr>
@@ -10991,7 +11113,7 @@
       </p:sp>
       <p:sp>
         <p:nvSpPr>
-          <p:cNvPr id="6" name="Text 4"/>
+          <p:cNvPr id="8" name="Text 5"/>
           <p:cNvSpPr/>
           <p:nvPr/>
         </p:nvSpPr>
@@ -11030,7 +11152,7 @@
       </p:sp>
       <p:sp>
         <p:nvSpPr>
-          <p:cNvPr id="7" name="Shape 5"/>
+          <p:cNvPr id="9" name="Shape 6"/>
           <p:cNvSpPr/>
           <p:nvPr/>
         </p:nvSpPr>
@@ -11059,7 +11181,7 @@
       </p:sp>
       <p:sp>
         <p:nvSpPr>
-          <p:cNvPr id="8" name="Text 6"/>
+          <p:cNvPr id="10" name="Text 7"/>
           <p:cNvSpPr/>
           <p:nvPr/>
         </p:nvSpPr>
@@ -11084,7 +11206,7 @@
             <a:r>
               <a:rPr lang="en-US" sz="1300" b="1" dirty="0">
                 <a:solidFill>
-                  <a:srgbClr val="2A9D8F"/>
+                  <a:srgbClr val="6FE7CF"/>
                 </a:solidFill>
                 <a:latin typeface="Hiragino Sans" pitchFamily="34" charset="0"/>
                 <a:ea typeface="Hiragino Sans" pitchFamily="34" charset="-122"/>
@@ -11098,7 +11220,7 @@
       </p:sp>
       <p:sp>
         <p:nvSpPr>
-          <p:cNvPr id="9" name="Text 7"/>
+          <p:cNvPr id="11" name="Text 8"/>
           <p:cNvSpPr/>
           <p:nvPr/>
         </p:nvSpPr>
@@ -11123,7 +11245,7 @@
             <a:r>
               <a:rPr lang="en-US" sz="1300" b="1" dirty="0">
                 <a:solidFill>
-                  <a:srgbClr val="2A9D8F"/>
+                  <a:srgbClr val="6FE7CF"/>
                 </a:solidFill>
                 <a:latin typeface="Hiragino Sans" pitchFamily="34" charset="0"/>
                 <a:ea typeface="Hiragino Sans" pitchFamily="34" charset="-122"/>
@@ -11137,7 +11259,7 @@
       </p:sp>
       <p:sp>
         <p:nvSpPr>
-          <p:cNvPr id="10" name="Text 8"/>
+          <p:cNvPr id="12" name="Text 9"/>
           <p:cNvSpPr/>
           <p:nvPr/>
         </p:nvSpPr>
@@ -11162,7 +11284,7 @@
             <a:r>
               <a:rPr lang="en-US" sz="1300" b="1" dirty="0">
                 <a:solidFill>
-                  <a:srgbClr val="2A9D8F"/>
+                  <a:srgbClr val="6FE7CF"/>
                 </a:solidFill>
                 <a:latin typeface="Hiragino Sans" pitchFamily="34" charset="0"/>
                 <a:ea typeface="Hiragino Sans" pitchFamily="34" charset="-122"/>
@@ -11176,7 +11298,7 @@
       </p:sp>
       <p:sp>
         <p:nvSpPr>
-          <p:cNvPr id="11" name="Text 9"/>
+          <p:cNvPr id="13" name="Text 10"/>
           <p:cNvSpPr/>
           <p:nvPr/>
         </p:nvSpPr>
@@ -11201,7 +11323,7 @@
             <a:r>
               <a:rPr lang="en-US" sz="1300" b="1" dirty="0">
                 <a:solidFill>
-                  <a:srgbClr val="2A9D8F"/>
+                  <a:srgbClr val="6FE7CF"/>
                 </a:solidFill>
                 <a:latin typeface="Hiragino Sans" pitchFamily="34" charset="0"/>
                 <a:ea typeface="Hiragino Sans" pitchFamily="34" charset="-122"/>
@@ -11215,7 +11337,7 @@
       </p:sp>
       <p:sp>
         <p:nvSpPr>
-          <p:cNvPr id="12" name="Text 10"/>
+          <p:cNvPr id="14" name="Text 11"/>
           <p:cNvSpPr/>
           <p:nvPr/>
         </p:nvSpPr>
@@ -11254,7 +11376,7 @@
       </p:sp>
       <p:sp>
         <p:nvSpPr>
-          <p:cNvPr id="13" name="Text 11"/>
+          <p:cNvPr id="15" name="Text 12"/>
           <p:cNvSpPr/>
           <p:nvPr/>
         </p:nvSpPr>
@@ -11293,7 +11415,7 @@
       </p:sp>
       <p:sp>
         <p:nvSpPr>
-          <p:cNvPr id="14" name="Text 12"/>
+          <p:cNvPr id="16" name="Text 13"/>
           <p:cNvSpPr/>
           <p:nvPr/>
         </p:nvSpPr>
@@ -11332,7 +11454,7 @@
       </p:sp>
       <p:sp>
         <p:nvSpPr>
-          <p:cNvPr id="15" name="Text 13"/>
+          <p:cNvPr id="17" name="Text 14"/>
           <p:cNvSpPr/>
           <p:nvPr/>
         </p:nvSpPr>
@@ -11371,7 +11493,7 @@
       </p:sp>
       <p:sp>
         <p:nvSpPr>
-          <p:cNvPr id="16" name="Text 14"/>
+          <p:cNvPr id="18" name="Text 15"/>
           <p:cNvSpPr/>
           <p:nvPr/>
         </p:nvSpPr>
@@ -11410,7 +11532,7 @@
       </p:sp>
       <p:sp>
         <p:nvSpPr>
-          <p:cNvPr id="17" name="Text 15"/>
+          <p:cNvPr id="19" name="Text 16"/>
           <p:cNvSpPr/>
           <p:nvPr/>
         </p:nvSpPr>
@@ -11449,7 +11571,7 @@
       </p:sp>
       <p:sp>
         <p:nvSpPr>
-          <p:cNvPr id="18" name="Text 16"/>
+          <p:cNvPr id="20" name="Text 17"/>
           <p:cNvSpPr/>
           <p:nvPr/>
         </p:nvSpPr>
@@ -11488,7 +11610,7 @@
       </p:sp>
       <p:sp>
         <p:nvSpPr>
-          <p:cNvPr id="19" name="Text 17"/>
+          <p:cNvPr id="21" name="Text 18"/>
           <p:cNvSpPr/>
           <p:nvPr/>
         </p:nvSpPr>
@@ -11527,7 +11649,7 @@
       </p:sp>
       <p:sp>
         <p:nvSpPr>
-          <p:cNvPr id="20" name="Text 18"/>
+          <p:cNvPr id="22" name="Text 19"/>
           <p:cNvSpPr/>
           <p:nvPr/>
         </p:nvSpPr>
@@ -11566,7 +11688,7 @@
       </p:sp>
       <p:sp>
         <p:nvSpPr>
-          <p:cNvPr id="21" name="Text 19"/>
+          <p:cNvPr id="23" name="Text 20"/>
           <p:cNvSpPr/>
           <p:nvPr/>
         </p:nvSpPr>
@@ -11605,7 +11727,7 @@
       </p:sp>
       <p:sp>
         <p:nvSpPr>
-          <p:cNvPr id="22" name="Text 20"/>
+          <p:cNvPr id="24" name="Text 21"/>
           <p:cNvSpPr/>
           <p:nvPr/>
         </p:nvSpPr>
@@ -11644,7 +11766,7 @@
       </p:sp>
       <p:sp>
         <p:nvSpPr>
-          <p:cNvPr id="23" name="Text 21"/>
+          <p:cNvPr id="25" name="Text 22"/>
           <p:cNvSpPr/>
           <p:nvPr/>
         </p:nvSpPr>
@@ -11683,7 +11805,7 @@
       </p:sp>
       <p:sp>
         <p:nvSpPr>
-          <p:cNvPr id="24" name="Text 22"/>
+          <p:cNvPr id="26" name="Text 23"/>
           <p:cNvSpPr/>
           <p:nvPr/>
         </p:nvSpPr>

--- a/apps/api/src/main/resources/static/proposal/fleetmind-proposal-deck.pptx
+++ b/apps/api/src/main/resources/static/proposal/fleetmind-proposal-deck.pptx
@@ -122,267 +122,6 @@
 </p:presentation>
 </file>
 
-<file path=ppt/charts/chart1.xml><?xml version="1.0" encoding="utf-8"?>
-<c:chartSpace xmlns:c="http://schemas.openxmlformats.org/drawingml/2006/chart" xmlns:a="http://schemas.openxmlformats.org/drawingml/2006/main" xmlns:r="http://schemas.openxmlformats.org/officeDocument/2006/relationships">
-  <c:date1904 val="0"/>
-  <c:roundedCorners val="1"/>
-  <c:chart>
-    <c:autoTitleDeleted val="1"/>
-    <c:plotArea>
-      <c:layout/>
-      <c:barChart>
-        <c:barDir val="col"/>
-        <c:grouping val="clustered"/>
-        <c:varyColors val="0"/>
-        <c:ser>
-          <c:idx val="0"/>
-          <c:order val="0"/>
-          <c:tx>
-            <c:strRef>
-              <c:f>Sheet1!$B$1</c:f>
-              <c:strCache>
-                <c:ptCount val="1"/>
-                <c:pt idx="0">
-                  <c:v>Speed Loss %</c:v>
-                </c:pt>
-              </c:strCache>
-            </c:strRef>
-          </c:tx>
-          <c:spPr>
-            <a:solidFill>
-              <a:srgbClr val="1C7293"/>
-            </a:solidFill>
-            <a:effectLst/>
-          </c:spPr>
-          <c:invertIfNegative val="0"/>
-          <c:dLbls>
-            <c:numFmt formatCode="0.0&quot;%&quot;" sourceLinked="0"/>
-            <c:txPr>
-              <a:bodyPr/>
-              <a:lstStyle/>
-              <a:p>
-                <a:pPr>
-                  <a:defRPr b="1" i="0" strike="noStrike" sz="1100" u="none">
-                    <a:solidFill>
-                      <a:srgbClr val="18293B"/>
-                    </a:solidFill>
-                    <a:latin typeface="Arial"/>
-                  </a:defRPr>
-                </a:pPr>
-              </a:p>
-            </c:txPr>
-            <c:showLegendKey val="0"/>
-            <c:showVal val="1"/>
-            <c:showCatName val="0"/>
-            <c:showSerName val="0"/>
-            <c:showPercent val="0"/>
-            <c:showBubbleSize val="0"/>
-            <c:showLeaderLines val="0"/>
-          </c:dLbls>
-          <c:cat>
-            <c:multiLvlStrRef>
-              <c:f>Sheet1!$A$2:$A$9</c:f>
-              <c:multiLvlStrCache>
-                <c:ptCount val="8"/>
-                <c:lvl>
-                  <c:pt idx="0">
-                    <c:v>S11</c:v>
-                  </c:pt>
-                  <c:pt idx="1">
-                    <c:v>S23</c:v>
-                  </c:pt>
-                  <c:pt idx="2">
-                    <c:v>S6</c:v>
-                  </c:pt>
-                  <c:pt idx="3">
-                    <c:v>S4</c:v>
-                  </c:pt>
-                  <c:pt idx="4">
-                    <c:v>S12</c:v>
-                  </c:pt>
-                  <c:pt idx="5">
-                    <c:v>S8</c:v>
-                  </c:pt>
-                  <c:pt idx="6">
-                    <c:v>S9</c:v>
-                  </c:pt>
-                  <c:pt idx="7">
-                    <c:v>S5</c:v>
-                  </c:pt>
-                </c:lvl>
-              </c:multiLvlStrCache>
-            </c:multiLvlStrRef>
-          </c:cat>
-          <c:val>
-            <c:numRef>
-              <c:f>Sheet1!$B$2:$B$9</c:f>
-              <c:numCache>
-                <c:formatCode>General</c:formatCode>
-                <c:ptCount val="8"/>
-                <c:pt idx="0">
-                  <c:v>21.8</c:v>
-                </c:pt>
-                <c:pt idx="1">
-                  <c:v>8.9</c:v>
-                </c:pt>
-                <c:pt idx="2">
-                  <c:v>8.8</c:v>
-                </c:pt>
-                <c:pt idx="3">
-                  <c:v>8.7</c:v>
-                </c:pt>
-                <c:pt idx="4">
-                  <c:v>8.4</c:v>
-                </c:pt>
-                <c:pt idx="5">
-                  <c:v>8.4</c:v>
-                </c:pt>
-                <c:pt idx="6">
-                  <c:v>6.4</c:v>
-                </c:pt>
-                <c:pt idx="7">
-                  <c:v>4.3</c:v>
-                </c:pt>
-              </c:numCache>
-            </c:numRef>
-          </c:val>
-        </c:ser>
-        <c:dLbls>
-          <c:numFmt formatCode="0.0&quot;%&quot;" sourceLinked="0"/>
-          <c:txPr>
-            <a:bodyPr/>
-            <a:lstStyle/>
-            <a:p>
-              <a:pPr>
-                <a:defRPr b="1" i="0" strike="noStrike" sz="1100" u="none">
-                  <a:solidFill>
-                    <a:srgbClr val="18293B"/>
-                  </a:solidFill>
-                  <a:latin typeface="Arial"/>
-                </a:defRPr>
-              </a:pPr>
-            </a:p>
-          </c:txPr>
-          <c:showLegendKey val="0"/>
-          <c:showVal val="1"/>
-          <c:showCatName val="0"/>
-          <c:showSerName val="0"/>
-          <c:showPercent val="0"/>
-          <c:showBubbleSize val="0"/>
-          <c:showLeaderLines val="0"/>
-        </c:dLbls>
-        <c:gapWidth val="150"/>
-        <c:overlap val="0"/>
-        <c:axId val="2094734554"/>
-        <c:axId val="2094734552"/>
-        <c:axId val="2094734556"/>
-      </c:barChart>
-      <c:catAx>
-        <c:axId val="2094734554"/>
-        <c:scaling>
-          <c:orientation val="minMax"/>
-        </c:scaling>
-        <c:delete val="0"/>
-        <c:axPos val="b"/>
-        <c:numFmt formatCode="General" sourceLinked="1"/>
-        <c:majorTickMark val="out"/>
-        <c:minorTickMark val="none"/>
-        <c:tickLblPos val="low"/>
-        <c:spPr>
-          <a:ln w="12700" cap="flat">
-            <a:solidFill>
-              <a:srgbClr val="888888"/>
-            </a:solidFill>
-            <a:prstDash val="solid"/>
-            <a:round/>
-          </a:ln>
-        </c:spPr>
-        <c:txPr>
-          <a:bodyPr/>
-          <a:lstStyle/>
-          <a:p>
-            <a:pPr>
-              <a:defRPr sz="1200" b="1" i="0" u="none" strike="noStrike">
-                <a:solidFill>
-                  <a:srgbClr val="18293B"/>
-                </a:solidFill>
-                <a:latin typeface="Arial"/>
-              </a:defRPr>
-            </a:pPr>
-            <a:endParaRPr lang="en-US"/>
-          </a:p>
-        </c:txPr>
-        <c:crossAx val="2094734552"/>
-        <c:crosses val="autoZero"/>
-        <c:auto val="1"/>
-        <c:lblAlgn val="ctr"/>
-        <c:noMultiLvlLbl val="1"/>
-      </c:catAx>
-      <c:valAx>
-        <c:axId val="2094734552"/>
-        <c:scaling>
-          <c:orientation val="minMax"/>
-          <c:max val="25"/>
-          <c:min val="0"/>
-        </c:scaling>
-        <c:delete val="1"/>
-        <c:axPos val="l"/>
-        <c:numFmt formatCode="General" sourceLinked="0"/>
-        <c:majorTickMark val="out"/>
-        <c:minorTickMark val="none"/>
-        <c:tickLblPos val="nextTo"/>
-        <c:spPr>
-          <a:ln w="12700" cap="flat">
-            <a:solidFill>
-              <a:srgbClr val="888888"/>
-            </a:solidFill>
-            <a:prstDash val="solid"/>
-            <a:round/>
-          </a:ln>
-        </c:spPr>
-        <c:txPr>
-          <a:bodyPr/>
-          <a:lstStyle/>
-          <a:p>
-            <a:pPr>
-              <a:defRPr sz="1200" b="0" i="0" u="none" strike="noStrike">
-                <a:solidFill>
-                  <a:srgbClr val="000000"/>
-                </a:solidFill>
-                <a:latin typeface="Arial"/>
-              </a:defRPr>
-            </a:pPr>
-            <a:endParaRPr lang="en-US"/>
-          </a:p>
-        </c:txPr>
-        <c:crossAx val="2094734554"/>
-        <c:crosses val="autoZero"/>
-        <c:crossBetween val="between"/>
-      </c:valAx>
-      <c:spPr>
-        <a:noFill/>
-        <a:ln>
-          <a:noFill/>
-        </a:ln>
-        <a:effectLst/>
-      </c:spPr>
-    </c:plotArea>
-    <c:plotVisOnly val="1"/>
-    <c:dispBlanksAs val="span"/>
-  </c:chart>
-  <c:spPr>
-    <a:noFill/>
-    <a:ln>
-      <a:noFill/>
-    </a:ln>
-    <a:effectLst/>
-  </c:spPr>
-  <c:externalData r:id="rId1">
-    <c:autoUpdate val="0"/>
-  </c:externalData>
-</c:chartSpace>
-</file>
-
 <file path=ppt/notesMasters/notesMaster1.xml><?xml version="1.0" encoding="utf-8"?>
 <p:notesMaster xmlns:a="http://schemas.openxmlformats.org/drawingml/2006/main" xmlns:r="http://schemas.openxmlformats.org/officeDocument/2006/relationships" xmlns:p="http://schemas.openxmlformats.org/presentationml/2006/main">
   <p:cSld>
@@ -997,7 +736,38 @@
  「數字哪來的」 → 直接回 dashboard 點引用，跳回 API
 答不出來時的誠信收尾句：
 「正午報表粒度下這是最誠實的做法；給我們軸功率／對水速度計資料，
- 框架直接升級 ISO 19030 全合規。」</a:t>
+ 框架直接升級 ISO 19030 全合規。」
+════════ 評審 5 項標準 · 上台口頭答法（Q&amp;A 端出這幾段） ════════
+評審資深顧問點名三個弱點：油耗預測講太淺、歸因沒答「為何是船殼不是海流/引擎」、
+AI 太像聊天。下面每段直接可念，結尾都有「給更多資料 → 能做什麼」的鉤子。
+① 互動介面 · Speed Loss
+ 「介面讓工程師逐船、逐航段檢視 Speed Loss；ISO 19030 務實改編，算 k=FOC/STW³，
+  只在 ±1 節同速帶比較，再用 Theil-Sen 抓長期趨勢。加入 AIS、天氣與對水速度，
+  就能更準確校正外部干擾。」
+② 油耗預測模型（最危險，要證明「這是真模型不只是指標」）
+ 「這是真正的 sklearn 預測 pipeline：物理基線 k·STW³ 接 HistGradientBoosting 擇優，
+  納入污損時鐘、船型與燃料熱值，經模擬遮蔽及 GroupKFold 防漏驗證，RMSE 3.51 MT，
+  預測 102 個被遮蔽的格子。**單靠 Noon Report 無法物理拆分原因**，目前僅依 Speed Loss
+  與維修時間關聯推估主因為船殼污損。加入天氣、引擎、螺旋槳檢查與 AIS，
+  就能建立完整油耗歸因模型。」
+③ 未盡之處 · 商業價值
+ 「限制是缺少天氣、海流、引擎感測、扭矩與軸功率，所以結論是可追溯的關聯推估，
+  不冒充物理因果。我們也不虛報金額，只指出 S23 同航速每日多耗約 16.4 MT。
+  補齊營運成本與感測資料，就能支援清洗、維修及船期決策。」
+④ 分析架構 · 演算法（評審問「用什麼算法」）
+ 「架構由確定性 core-calc 打底：同速帶 k 指標、Theil-Sen 趨勢、維修隔離區段歸因，
+  再接 sklearn 預測與 Bedrock 解讀；區段不足時明確標 50/50，不隱藏不確定性。
+  增加高頻感測資料，就能升級為時序模型與多因子因果分析。」
+ 一句話流程：Noon Report → 清洗 → ISO 19030 k → 趨勢偵測 → 決策排序 → Bedrock 摘要。
+⑤ AI 角色（第二危險，定位成 Decision Support 不是 Prediction Engine）
+ 「我們今天不是讓 AI 做判斷，而是讓 AI 幫助工程師更快做判斷。數字全由 core-calc 產生，
+  Claude Haiku 只負責解讀與決策簡報；guardrail 逐項核對來源，對不上就整篇打回，
+  最後由工程師拍板。**FleetMind 核心是 Explainable AI Decision Support，不是 Prediction
+  Engine，更不是 ChatGPT。**」
+三句一定要講：
+ 1「今天不是讓 AI 做判斷，而是讓 AI 幫工程師更快做判斷。」
+ 2「加入 Weather / Engine Sensor / Propeller Inspection / AIS，就能建真正的油耗歸因模型。」
+ 3「核心不是 ChatGPT，是把 ISO19030 + 維修紀錄 + AWS AI 結合成 Explainable Decision Support Platform。」</a:t>
             </a:r>
             <a:endParaRPr lang="en-US" dirty="0"/>
           </a:p>
@@ -9149,25 +8919,816 @@
           </a:p>
         </p:txBody>
       </p:sp>
-      <p:graphicFrame>
-        <p:nvGraphicFramePr>
-          <p:cNvPr id="4" name="Chart 0" descr=""/>
-          <p:cNvGraphicFramePr/>
-          <p:nvPr/>
-        </p:nvGraphicFramePr>
-        <p:xfrm>
-          <a:off x="640080" y="1737360"/>
-          <a:ext cx="6400800" cy="4206240"/>
-        </p:xfrm>
-        <a:graphic xmlns:a="http://schemas.openxmlformats.org/drawingml/2006/main">
-          <a:graphicData uri="http://schemas.openxmlformats.org/drawingml/2006/chart">
-            <c:chart xmlns:c="http://schemas.openxmlformats.org/drawingml/2006/chart" r:id="rId1"/>
-          </a:graphicData>
-        </a:graphic>
-      </p:graphicFrame>
-      <p:sp>
-        <p:nvSpPr>
-          <p:cNvPr id="5" name="Text 2"/>
+      <p:sp>
+        <p:nvSpPr>
+          <p:cNvPr id="4" name="Shape 2"/>
+          <p:cNvSpPr/>
+          <p:nvPr/>
+        </p:nvSpPr>
+        <p:spPr>
+          <a:xfrm>
+            <a:off x="816102" y="2536180"/>
+            <a:ext cx="448056" cy="2950220"/>
+          </a:xfrm>
+          <a:prstGeom prst="rect">
+            <a:avLst/>
+          </a:prstGeom>
+          <a:solidFill>
+            <a:srgbClr val="E76F51"/>
+          </a:solidFill>
+          <a:ln/>
+        </p:spPr>
+      </p:sp>
+      <p:sp>
+        <p:nvSpPr>
+          <p:cNvPr id="5" name="Text 3"/>
+          <p:cNvSpPr/>
+          <p:nvPr/>
+        </p:nvSpPr>
+        <p:spPr>
+          <a:xfrm>
+            <a:off x="633222" y="2188708"/>
+            <a:ext cx="813816" cy="310896"/>
+          </a:xfrm>
+          <a:prstGeom prst="rect">
+            <a:avLst/>
+          </a:prstGeom>
+          <a:noFill/>
+          <a:ln/>
+        </p:spPr>
+        <p:txBody>
+          <a:bodyPr wrap="square" lIns="0" tIns="0" rIns="0" bIns="0" rtlCol="0" anchor="ctr"/>
+          <a:lstStyle/>
+          <a:p>
+            <a:pPr algn="ctr" indent="0" marL="0">
+              <a:buNone/>
+            </a:pPr>
+            <a:r>
+              <a:rPr lang="en-US" sz="1100" b="1" dirty="0">
+                <a:solidFill>
+                  <a:srgbClr val="E76F51"/>
+                </a:solidFill>
+                <a:latin typeface="Hiragino Sans" pitchFamily="34" charset="0"/>
+                <a:ea typeface="Hiragino Sans" pitchFamily="34" charset="-122"/>
+                <a:cs typeface="Hiragino Sans" pitchFamily="34" charset="-120"/>
+              </a:rPr>
+              <a:t>21.8%</a:t>
+            </a:r>
+            <a:endParaRPr lang="en-US" sz="1100" dirty="0"/>
+          </a:p>
+        </p:txBody>
+      </p:sp>
+      <p:sp>
+        <p:nvSpPr>
+          <p:cNvPr id="6" name="Text 4"/>
+          <p:cNvSpPr/>
+          <p:nvPr/>
+        </p:nvSpPr>
+        <p:spPr>
+          <a:xfrm>
+            <a:off x="633222" y="5541264"/>
+            <a:ext cx="813816" cy="310896"/>
+          </a:xfrm>
+          <a:prstGeom prst="rect">
+            <a:avLst/>
+          </a:prstGeom>
+          <a:noFill/>
+          <a:ln/>
+        </p:spPr>
+        <p:txBody>
+          <a:bodyPr wrap="square" lIns="0" tIns="0" rIns="0" bIns="0" rtlCol="0" anchor="ctr"/>
+          <a:lstStyle/>
+          <a:p>
+            <a:pPr algn="ctr" indent="0" marL="0">
+              <a:buNone/>
+            </a:pPr>
+            <a:r>
+              <a:rPr lang="en-US" sz="1200" b="1" dirty="0">
+                <a:solidFill>
+                  <a:srgbClr val="18293B"/>
+                </a:solidFill>
+                <a:latin typeface="Hiragino Sans" pitchFamily="34" charset="0"/>
+                <a:ea typeface="Hiragino Sans" pitchFamily="34" charset="-122"/>
+                <a:cs typeface="Hiragino Sans" pitchFamily="34" charset="-120"/>
+              </a:rPr>
+              <a:t>S11</a:t>
+            </a:r>
+            <a:endParaRPr lang="en-US" sz="1200" dirty="0"/>
+          </a:p>
+        </p:txBody>
+      </p:sp>
+      <p:sp>
+        <p:nvSpPr>
+          <p:cNvPr id="7" name="Shape 5"/>
+          <p:cNvSpPr/>
+          <p:nvPr/>
+        </p:nvSpPr>
+        <p:spPr>
+          <a:xfrm>
+            <a:off x="1616202" y="4281952"/>
+            <a:ext cx="448056" cy="1204448"/>
+          </a:xfrm>
+          <a:prstGeom prst="rect">
+            <a:avLst/>
+          </a:prstGeom>
+          <a:solidFill>
+            <a:srgbClr val="1C7293"/>
+          </a:solidFill>
+          <a:ln/>
+        </p:spPr>
+      </p:sp>
+      <p:sp>
+        <p:nvSpPr>
+          <p:cNvPr id="8" name="Text 6"/>
+          <p:cNvSpPr/>
+          <p:nvPr/>
+        </p:nvSpPr>
+        <p:spPr>
+          <a:xfrm>
+            <a:off x="1433322" y="3934480"/>
+            <a:ext cx="813816" cy="310896"/>
+          </a:xfrm>
+          <a:prstGeom prst="rect">
+            <a:avLst/>
+          </a:prstGeom>
+          <a:noFill/>
+          <a:ln/>
+        </p:spPr>
+        <p:txBody>
+          <a:bodyPr wrap="square" lIns="0" tIns="0" rIns="0" bIns="0" rtlCol="0" anchor="ctr"/>
+          <a:lstStyle/>
+          <a:p>
+            <a:pPr algn="ctr" indent="0" marL="0">
+              <a:buNone/>
+            </a:pPr>
+            <a:r>
+              <a:rPr lang="en-US" sz="1100" b="1" dirty="0">
+                <a:solidFill>
+                  <a:srgbClr val="18293B"/>
+                </a:solidFill>
+                <a:latin typeface="Hiragino Sans" pitchFamily="34" charset="0"/>
+                <a:ea typeface="Hiragino Sans" pitchFamily="34" charset="-122"/>
+                <a:cs typeface="Hiragino Sans" pitchFamily="34" charset="-120"/>
+              </a:rPr>
+              <a:t>8.9%</a:t>
+            </a:r>
+            <a:endParaRPr lang="en-US" sz="1100" dirty="0"/>
+          </a:p>
+        </p:txBody>
+      </p:sp>
+      <p:sp>
+        <p:nvSpPr>
+          <p:cNvPr id="9" name="Text 7"/>
+          <p:cNvSpPr/>
+          <p:nvPr/>
+        </p:nvSpPr>
+        <p:spPr>
+          <a:xfrm>
+            <a:off x="1433322" y="5541264"/>
+            <a:ext cx="813816" cy="310896"/>
+          </a:xfrm>
+          <a:prstGeom prst="rect">
+            <a:avLst/>
+          </a:prstGeom>
+          <a:noFill/>
+          <a:ln/>
+        </p:spPr>
+        <p:txBody>
+          <a:bodyPr wrap="square" lIns="0" tIns="0" rIns="0" bIns="0" rtlCol="0" anchor="ctr"/>
+          <a:lstStyle/>
+          <a:p>
+            <a:pPr algn="ctr" indent="0" marL="0">
+              <a:buNone/>
+            </a:pPr>
+            <a:r>
+              <a:rPr lang="en-US" sz="1200" b="1" dirty="0">
+                <a:solidFill>
+                  <a:srgbClr val="18293B"/>
+                </a:solidFill>
+                <a:latin typeface="Hiragino Sans" pitchFamily="34" charset="0"/>
+                <a:ea typeface="Hiragino Sans" pitchFamily="34" charset="-122"/>
+                <a:cs typeface="Hiragino Sans" pitchFamily="34" charset="-120"/>
+              </a:rPr>
+              <a:t>S23</a:t>
+            </a:r>
+            <a:endParaRPr lang="en-US" sz="1200" dirty="0"/>
+          </a:p>
+        </p:txBody>
+      </p:sp>
+      <p:sp>
+        <p:nvSpPr>
+          <p:cNvPr id="10" name="Shape 8"/>
+          <p:cNvSpPr/>
+          <p:nvPr/>
+        </p:nvSpPr>
+        <p:spPr>
+          <a:xfrm>
+            <a:off x="2416302" y="4295485"/>
+            <a:ext cx="448056" cy="1190915"/>
+          </a:xfrm>
+          <a:prstGeom prst="rect">
+            <a:avLst/>
+          </a:prstGeom>
+          <a:solidFill>
+            <a:srgbClr val="1C7293"/>
+          </a:solidFill>
+          <a:ln/>
+        </p:spPr>
+      </p:sp>
+      <p:sp>
+        <p:nvSpPr>
+          <p:cNvPr id="11" name="Text 9"/>
+          <p:cNvSpPr/>
+          <p:nvPr/>
+        </p:nvSpPr>
+        <p:spPr>
+          <a:xfrm>
+            <a:off x="2233422" y="3948013"/>
+            <a:ext cx="813816" cy="310896"/>
+          </a:xfrm>
+          <a:prstGeom prst="rect">
+            <a:avLst/>
+          </a:prstGeom>
+          <a:noFill/>
+          <a:ln/>
+        </p:spPr>
+        <p:txBody>
+          <a:bodyPr wrap="square" lIns="0" tIns="0" rIns="0" bIns="0" rtlCol="0" anchor="ctr"/>
+          <a:lstStyle/>
+          <a:p>
+            <a:pPr algn="ctr" indent="0" marL="0">
+              <a:buNone/>
+            </a:pPr>
+            <a:r>
+              <a:rPr lang="en-US" sz="1100" b="1" dirty="0">
+                <a:solidFill>
+                  <a:srgbClr val="18293B"/>
+                </a:solidFill>
+                <a:latin typeface="Hiragino Sans" pitchFamily="34" charset="0"/>
+                <a:ea typeface="Hiragino Sans" pitchFamily="34" charset="-122"/>
+                <a:cs typeface="Hiragino Sans" pitchFamily="34" charset="-120"/>
+              </a:rPr>
+              <a:t>8.8%</a:t>
+            </a:r>
+            <a:endParaRPr lang="en-US" sz="1100" dirty="0"/>
+          </a:p>
+        </p:txBody>
+      </p:sp>
+      <p:sp>
+        <p:nvSpPr>
+          <p:cNvPr id="12" name="Text 10"/>
+          <p:cNvSpPr/>
+          <p:nvPr/>
+        </p:nvSpPr>
+        <p:spPr>
+          <a:xfrm>
+            <a:off x="2233422" y="5541264"/>
+            <a:ext cx="813816" cy="310896"/>
+          </a:xfrm>
+          <a:prstGeom prst="rect">
+            <a:avLst/>
+          </a:prstGeom>
+          <a:noFill/>
+          <a:ln/>
+        </p:spPr>
+        <p:txBody>
+          <a:bodyPr wrap="square" lIns="0" tIns="0" rIns="0" bIns="0" rtlCol="0" anchor="ctr"/>
+          <a:lstStyle/>
+          <a:p>
+            <a:pPr algn="ctr" indent="0" marL="0">
+              <a:buNone/>
+            </a:pPr>
+            <a:r>
+              <a:rPr lang="en-US" sz="1200" b="1" dirty="0">
+                <a:solidFill>
+                  <a:srgbClr val="18293B"/>
+                </a:solidFill>
+                <a:latin typeface="Hiragino Sans" pitchFamily="34" charset="0"/>
+                <a:ea typeface="Hiragino Sans" pitchFamily="34" charset="-122"/>
+                <a:cs typeface="Hiragino Sans" pitchFamily="34" charset="-120"/>
+              </a:rPr>
+              <a:t>S6</a:t>
+            </a:r>
+            <a:endParaRPr lang="en-US" sz="1200" dirty="0"/>
+          </a:p>
+        </p:txBody>
+      </p:sp>
+      <p:sp>
+        <p:nvSpPr>
+          <p:cNvPr id="13" name="Shape 11"/>
+          <p:cNvSpPr/>
+          <p:nvPr/>
+        </p:nvSpPr>
+        <p:spPr>
+          <a:xfrm>
+            <a:off x="3216402" y="4309019"/>
+            <a:ext cx="448056" cy="1177381"/>
+          </a:xfrm>
+          <a:prstGeom prst="rect">
+            <a:avLst/>
+          </a:prstGeom>
+          <a:solidFill>
+            <a:srgbClr val="1C7293"/>
+          </a:solidFill>
+          <a:ln/>
+        </p:spPr>
+      </p:sp>
+      <p:sp>
+        <p:nvSpPr>
+          <p:cNvPr id="14" name="Text 12"/>
+          <p:cNvSpPr/>
+          <p:nvPr/>
+        </p:nvSpPr>
+        <p:spPr>
+          <a:xfrm>
+            <a:off x="3033522" y="3961547"/>
+            <a:ext cx="813816" cy="310896"/>
+          </a:xfrm>
+          <a:prstGeom prst="rect">
+            <a:avLst/>
+          </a:prstGeom>
+          <a:noFill/>
+          <a:ln/>
+        </p:spPr>
+        <p:txBody>
+          <a:bodyPr wrap="square" lIns="0" tIns="0" rIns="0" bIns="0" rtlCol="0" anchor="ctr"/>
+          <a:lstStyle/>
+          <a:p>
+            <a:pPr algn="ctr" indent="0" marL="0">
+              <a:buNone/>
+            </a:pPr>
+            <a:r>
+              <a:rPr lang="en-US" sz="1100" b="1" dirty="0">
+                <a:solidFill>
+                  <a:srgbClr val="18293B"/>
+                </a:solidFill>
+                <a:latin typeface="Hiragino Sans" pitchFamily="34" charset="0"/>
+                <a:ea typeface="Hiragino Sans" pitchFamily="34" charset="-122"/>
+                <a:cs typeface="Hiragino Sans" pitchFamily="34" charset="-120"/>
+              </a:rPr>
+              <a:t>8.7%</a:t>
+            </a:r>
+            <a:endParaRPr lang="en-US" sz="1100" dirty="0"/>
+          </a:p>
+        </p:txBody>
+      </p:sp>
+      <p:sp>
+        <p:nvSpPr>
+          <p:cNvPr id="15" name="Text 13"/>
+          <p:cNvSpPr/>
+          <p:nvPr/>
+        </p:nvSpPr>
+        <p:spPr>
+          <a:xfrm>
+            <a:off x="3033522" y="5541264"/>
+            <a:ext cx="813816" cy="310896"/>
+          </a:xfrm>
+          <a:prstGeom prst="rect">
+            <a:avLst/>
+          </a:prstGeom>
+          <a:noFill/>
+          <a:ln/>
+        </p:spPr>
+        <p:txBody>
+          <a:bodyPr wrap="square" lIns="0" tIns="0" rIns="0" bIns="0" rtlCol="0" anchor="ctr"/>
+          <a:lstStyle/>
+          <a:p>
+            <a:pPr algn="ctr" indent="0" marL="0">
+              <a:buNone/>
+            </a:pPr>
+            <a:r>
+              <a:rPr lang="en-US" sz="1200" b="1" dirty="0">
+                <a:solidFill>
+                  <a:srgbClr val="18293B"/>
+                </a:solidFill>
+                <a:latin typeface="Hiragino Sans" pitchFamily="34" charset="0"/>
+                <a:ea typeface="Hiragino Sans" pitchFamily="34" charset="-122"/>
+                <a:cs typeface="Hiragino Sans" pitchFamily="34" charset="-120"/>
+              </a:rPr>
+              <a:t>S4</a:t>
+            </a:r>
+            <a:endParaRPr lang="en-US" sz="1200" dirty="0"/>
+          </a:p>
+        </p:txBody>
+      </p:sp>
+      <p:sp>
+        <p:nvSpPr>
+          <p:cNvPr id="16" name="Shape 14"/>
+          <p:cNvSpPr/>
+          <p:nvPr/>
+        </p:nvSpPr>
+        <p:spPr>
+          <a:xfrm>
+            <a:off x="4016502" y="4349618"/>
+            <a:ext cx="448056" cy="1136782"/>
+          </a:xfrm>
+          <a:prstGeom prst="rect">
+            <a:avLst/>
+          </a:prstGeom>
+          <a:solidFill>
+            <a:srgbClr val="1C7293"/>
+          </a:solidFill>
+          <a:ln/>
+        </p:spPr>
+      </p:sp>
+      <p:sp>
+        <p:nvSpPr>
+          <p:cNvPr id="17" name="Text 15"/>
+          <p:cNvSpPr/>
+          <p:nvPr/>
+        </p:nvSpPr>
+        <p:spPr>
+          <a:xfrm>
+            <a:off x="3833622" y="4002146"/>
+            <a:ext cx="813816" cy="310896"/>
+          </a:xfrm>
+          <a:prstGeom prst="rect">
+            <a:avLst/>
+          </a:prstGeom>
+          <a:noFill/>
+          <a:ln/>
+        </p:spPr>
+        <p:txBody>
+          <a:bodyPr wrap="square" lIns="0" tIns="0" rIns="0" bIns="0" rtlCol="0" anchor="ctr"/>
+          <a:lstStyle/>
+          <a:p>
+            <a:pPr algn="ctr" indent="0" marL="0">
+              <a:buNone/>
+            </a:pPr>
+            <a:r>
+              <a:rPr lang="en-US" sz="1100" b="1" dirty="0">
+                <a:solidFill>
+                  <a:srgbClr val="18293B"/>
+                </a:solidFill>
+                <a:latin typeface="Hiragino Sans" pitchFamily="34" charset="0"/>
+                <a:ea typeface="Hiragino Sans" pitchFamily="34" charset="-122"/>
+                <a:cs typeface="Hiragino Sans" pitchFamily="34" charset="-120"/>
+              </a:rPr>
+              <a:t>8.4%</a:t>
+            </a:r>
+            <a:endParaRPr lang="en-US" sz="1100" dirty="0"/>
+          </a:p>
+        </p:txBody>
+      </p:sp>
+      <p:sp>
+        <p:nvSpPr>
+          <p:cNvPr id="18" name="Text 16"/>
+          <p:cNvSpPr/>
+          <p:nvPr/>
+        </p:nvSpPr>
+        <p:spPr>
+          <a:xfrm>
+            <a:off x="3833622" y="5541264"/>
+            <a:ext cx="813816" cy="310896"/>
+          </a:xfrm>
+          <a:prstGeom prst="rect">
+            <a:avLst/>
+          </a:prstGeom>
+          <a:noFill/>
+          <a:ln/>
+        </p:spPr>
+        <p:txBody>
+          <a:bodyPr wrap="square" lIns="0" tIns="0" rIns="0" bIns="0" rtlCol="0" anchor="ctr"/>
+          <a:lstStyle/>
+          <a:p>
+            <a:pPr algn="ctr" indent="0" marL="0">
+              <a:buNone/>
+            </a:pPr>
+            <a:r>
+              <a:rPr lang="en-US" sz="1200" b="1" dirty="0">
+                <a:solidFill>
+                  <a:srgbClr val="18293B"/>
+                </a:solidFill>
+                <a:latin typeface="Hiragino Sans" pitchFamily="34" charset="0"/>
+                <a:ea typeface="Hiragino Sans" pitchFamily="34" charset="-122"/>
+                <a:cs typeface="Hiragino Sans" pitchFamily="34" charset="-120"/>
+              </a:rPr>
+              <a:t>S12</a:t>
+            </a:r>
+            <a:endParaRPr lang="en-US" sz="1200" dirty="0"/>
+          </a:p>
+        </p:txBody>
+      </p:sp>
+      <p:sp>
+        <p:nvSpPr>
+          <p:cNvPr id="19" name="Shape 17"/>
+          <p:cNvSpPr/>
+          <p:nvPr/>
+        </p:nvSpPr>
+        <p:spPr>
+          <a:xfrm>
+            <a:off x="4816602" y="4349618"/>
+            <a:ext cx="448056" cy="1136782"/>
+          </a:xfrm>
+          <a:prstGeom prst="rect">
+            <a:avLst/>
+          </a:prstGeom>
+          <a:solidFill>
+            <a:srgbClr val="1C7293"/>
+          </a:solidFill>
+          <a:ln/>
+        </p:spPr>
+      </p:sp>
+      <p:sp>
+        <p:nvSpPr>
+          <p:cNvPr id="20" name="Text 18"/>
+          <p:cNvSpPr/>
+          <p:nvPr/>
+        </p:nvSpPr>
+        <p:spPr>
+          <a:xfrm>
+            <a:off x="4633722" y="4002146"/>
+            <a:ext cx="813816" cy="310896"/>
+          </a:xfrm>
+          <a:prstGeom prst="rect">
+            <a:avLst/>
+          </a:prstGeom>
+          <a:noFill/>
+          <a:ln/>
+        </p:spPr>
+        <p:txBody>
+          <a:bodyPr wrap="square" lIns="0" tIns="0" rIns="0" bIns="0" rtlCol="0" anchor="ctr"/>
+          <a:lstStyle/>
+          <a:p>
+            <a:pPr algn="ctr" indent="0" marL="0">
+              <a:buNone/>
+            </a:pPr>
+            <a:r>
+              <a:rPr lang="en-US" sz="1100" b="1" dirty="0">
+                <a:solidFill>
+                  <a:srgbClr val="18293B"/>
+                </a:solidFill>
+                <a:latin typeface="Hiragino Sans" pitchFamily="34" charset="0"/>
+                <a:ea typeface="Hiragino Sans" pitchFamily="34" charset="-122"/>
+                <a:cs typeface="Hiragino Sans" pitchFamily="34" charset="-120"/>
+              </a:rPr>
+              <a:t>8.4%</a:t>
+            </a:r>
+            <a:endParaRPr lang="en-US" sz="1100" dirty="0"/>
+          </a:p>
+        </p:txBody>
+      </p:sp>
+      <p:sp>
+        <p:nvSpPr>
+          <p:cNvPr id="21" name="Text 19"/>
+          <p:cNvSpPr/>
+          <p:nvPr/>
+        </p:nvSpPr>
+        <p:spPr>
+          <a:xfrm>
+            <a:off x="4633722" y="5541264"/>
+            <a:ext cx="813816" cy="310896"/>
+          </a:xfrm>
+          <a:prstGeom prst="rect">
+            <a:avLst/>
+          </a:prstGeom>
+          <a:noFill/>
+          <a:ln/>
+        </p:spPr>
+        <p:txBody>
+          <a:bodyPr wrap="square" lIns="0" tIns="0" rIns="0" bIns="0" rtlCol="0" anchor="ctr"/>
+          <a:lstStyle/>
+          <a:p>
+            <a:pPr algn="ctr" indent="0" marL="0">
+              <a:buNone/>
+            </a:pPr>
+            <a:r>
+              <a:rPr lang="en-US" sz="1200" b="1" dirty="0">
+                <a:solidFill>
+                  <a:srgbClr val="18293B"/>
+                </a:solidFill>
+                <a:latin typeface="Hiragino Sans" pitchFamily="34" charset="0"/>
+                <a:ea typeface="Hiragino Sans" pitchFamily="34" charset="-122"/>
+                <a:cs typeface="Hiragino Sans" pitchFamily="34" charset="-120"/>
+              </a:rPr>
+              <a:t>S8</a:t>
+            </a:r>
+            <a:endParaRPr lang="en-US" sz="1200" dirty="0"/>
+          </a:p>
+        </p:txBody>
+      </p:sp>
+      <p:sp>
+        <p:nvSpPr>
+          <p:cNvPr id="22" name="Shape 20"/>
+          <p:cNvSpPr/>
+          <p:nvPr/>
+        </p:nvSpPr>
+        <p:spPr>
+          <a:xfrm>
+            <a:off x="5616702" y="4620280"/>
+            <a:ext cx="448056" cy="866120"/>
+          </a:xfrm>
+          <a:prstGeom prst="rect">
+            <a:avLst/>
+          </a:prstGeom>
+          <a:solidFill>
+            <a:srgbClr val="1C7293"/>
+          </a:solidFill>
+          <a:ln/>
+        </p:spPr>
+      </p:sp>
+      <p:sp>
+        <p:nvSpPr>
+          <p:cNvPr id="23" name="Text 21"/>
+          <p:cNvSpPr/>
+          <p:nvPr/>
+        </p:nvSpPr>
+        <p:spPr>
+          <a:xfrm>
+            <a:off x="5433822" y="4272808"/>
+            <a:ext cx="813816" cy="310896"/>
+          </a:xfrm>
+          <a:prstGeom prst="rect">
+            <a:avLst/>
+          </a:prstGeom>
+          <a:noFill/>
+          <a:ln/>
+        </p:spPr>
+        <p:txBody>
+          <a:bodyPr wrap="square" lIns="0" tIns="0" rIns="0" bIns="0" rtlCol="0" anchor="ctr"/>
+          <a:lstStyle/>
+          <a:p>
+            <a:pPr algn="ctr" indent="0" marL="0">
+              <a:buNone/>
+            </a:pPr>
+            <a:r>
+              <a:rPr lang="en-US" sz="1100" b="1" dirty="0">
+                <a:solidFill>
+                  <a:srgbClr val="18293B"/>
+                </a:solidFill>
+                <a:latin typeface="Hiragino Sans" pitchFamily="34" charset="0"/>
+                <a:ea typeface="Hiragino Sans" pitchFamily="34" charset="-122"/>
+                <a:cs typeface="Hiragino Sans" pitchFamily="34" charset="-120"/>
+              </a:rPr>
+              <a:t>6.4%</a:t>
+            </a:r>
+            <a:endParaRPr lang="en-US" sz="1100" dirty="0"/>
+          </a:p>
+        </p:txBody>
+      </p:sp>
+      <p:sp>
+        <p:nvSpPr>
+          <p:cNvPr id="24" name="Text 22"/>
+          <p:cNvSpPr/>
+          <p:nvPr/>
+        </p:nvSpPr>
+        <p:spPr>
+          <a:xfrm>
+            <a:off x="5433822" y="5541264"/>
+            <a:ext cx="813816" cy="310896"/>
+          </a:xfrm>
+          <a:prstGeom prst="rect">
+            <a:avLst/>
+          </a:prstGeom>
+          <a:noFill/>
+          <a:ln/>
+        </p:spPr>
+        <p:txBody>
+          <a:bodyPr wrap="square" lIns="0" tIns="0" rIns="0" bIns="0" rtlCol="0" anchor="ctr"/>
+          <a:lstStyle/>
+          <a:p>
+            <a:pPr algn="ctr" indent="0" marL="0">
+              <a:buNone/>
+            </a:pPr>
+            <a:r>
+              <a:rPr lang="en-US" sz="1200" b="1" dirty="0">
+                <a:solidFill>
+                  <a:srgbClr val="18293B"/>
+                </a:solidFill>
+                <a:latin typeface="Hiragino Sans" pitchFamily="34" charset="0"/>
+                <a:ea typeface="Hiragino Sans" pitchFamily="34" charset="-122"/>
+                <a:cs typeface="Hiragino Sans" pitchFamily="34" charset="-120"/>
+              </a:rPr>
+              <a:t>S9</a:t>
+            </a:r>
+            <a:endParaRPr lang="en-US" sz="1200" dirty="0"/>
+          </a:p>
+        </p:txBody>
+      </p:sp>
+      <p:sp>
+        <p:nvSpPr>
+          <p:cNvPr id="25" name="Shape 23"/>
+          <p:cNvSpPr/>
+          <p:nvPr/>
+        </p:nvSpPr>
+        <p:spPr>
+          <a:xfrm>
+            <a:off x="6416802" y="4904476"/>
+            <a:ext cx="448056" cy="581924"/>
+          </a:xfrm>
+          <a:prstGeom prst="rect">
+            <a:avLst/>
+          </a:prstGeom>
+          <a:solidFill>
+            <a:srgbClr val="1C7293"/>
+          </a:solidFill>
+          <a:ln/>
+        </p:spPr>
+      </p:sp>
+      <p:sp>
+        <p:nvSpPr>
+          <p:cNvPr id="26" name="Text 24"/>
+          <p:cNvSpPr/>
+          <p:nvPr/>
+        </p:nvSpPr>
+        <p:spPr>
+          <a:xfrm>
+            <a:off x="6233922" y="4557004"/>
+            <a:ext cx="813816" cy="310896"/>
+          </a:xfrm>
+          <a:prstGeom prst="rect">
+            <a:avLst/>
+          </a:prstGeom>
+          <a:noFill/>
+          <a:ln/>
+        </p:spPr>
+        <p:txBody>
+          <a:bodyPr wrap="square" lIns="0" tIns="0" rIns="0" bIns="0" rtlCol="0" anchor="ctr"/>
+          <a:lstStyle/>
+          <a:p>
+            <a:pPr algn="ctr" indent="0" marL="0">
+              <a:buNone/>
+            </a:pPr>
+            <a:r>
+              <a:rPr lang="en-US" sz="1100" b="1" dirty="0">
+                <a:solidFill>
+                  <a:srgbClr val="18293B"/>
+                </a:solidFill>
+                <a:latin typeface="Hiragino Sans" pitchFamily="34" charset="0"/>
+                <a:ea typeface="Hiragino Sans" pitchFamily="34" charset="-122"/>
+                <a:cs typeface="Hiragino Sans" pitchFamily="34" charset="-120"/>
+              </a:rPr>
+              <a:t>4.3%</a:t>
+            </a:r>
+            <a:endParaRPr lang="en-US" sz="1100" dirty="0"/>
+          </a:p>
+        </p:txBody>
+      </p:sp>
+      <p:sp>
+        <p:nvSpPr>
+          <p:cNvPr id="27" name="Text 25"/>
+          <p:cNvSpPr/>
+          <p:nvPr/>
+        </p:nvSpPr>
+        <p:spPr>
+          <a:xfrm>
+            <a:off x="6233922" y="5541264"/>
+            <a:ext cx="813816" cy="310896"/>
+          </a:xfrm>
+          <a:prstGeom prst="rect">
+            <a:avLst/>
+          </a:prstGeom>
+          <a:noFill/>
+          <a:ln/>
+        </p:spPr>
+        <p:txBody>
+          <a:bodyPr wrap="square" lIns="0" tIns="0" rIns="0" bIns="0" rtlCol="0" anchor="ctr"/>
+          <a:lstStyle/>
+          <a:p>
+            <a:pPr algn="ctr" indent="0" marL="0">
+              <a:buNone/>
+            </a:pPr>
+            <a:r>
+              <a:rPr lang="en-US" sz="1200" b="1" dirty="0">
+                <a:solidFill>
+                  <a:srgbClr val="18293B"/>
+                </a:solidFill>
+                <a:latin typeface="Hiragino Sans" pitchFamily="34" charset="0"/>
+                <a:ea typeface="Hiragino Sans" pitchFamily="34" charset="-122"/>
+                <a:cs typeface="Hiragino Sans" pitchFamily="34" charset="-120"/>
+              </a:rPr>
+              <a:t>S5</a:t>
+            </a:r>
+            <a:endParaRPr lang="en-US" sz="1200" dirty="0"/>
+          </a:p>
+        </p:txBody>
+      </p:sp>
+      <p:sp>
+        <p:nvSpPr>
+          <p:cNvPr id="28" name="Shape 26"/>
+          <p:cNvSpPr/>
+          <p:nvPr/>
+        </p:nvSpPr>
+        <p:spPr>
+          <a:xfrm>
+            <a:off x="640080" y="5486400"/>
+            <a:ext cx="6400800" cy="0"/>
+          </a:xfrm>
+          <a:prstGeom prst="line">
+            <a:avLst/>
+          </a:prstGeom>
+          <a:noFill/>
+          <a:ln w="12700">
+            <a:solidFill>
+              <a:srgbClr val="CBD8E2"/>
+            </a:solidFill>
+            <a:prstDash val="solid"/>
+          </a:ln>
+        </p:spPr>
+      </p:sp>
+      <p:sp>
+        <p:nvSpPr>
+          <p:cNvPr id="29" name="Text 27"/>
           <p:cNvSpPr/>
           <p:nvPr/>
         </p:nvSpPr>
@@ -9206,7 +9767,7 @@
       </p:sp>
       <p:sp>
         <p:nvSpPr>
-          <p:cNvPr id="6" name="Shape 3"/>
+          <p:cNvPr id="30" name="Shape 28"/>
           <p:cNvSpPr/>
           <p:nvPr/>
         </p:nvSpPr>
@@ -9235,7 +9796,7 @@
       </p:sp>
       <p:sp>
         <p:nvSpPr>
-          <p:cNvPr id="7" name="Text 4"/>
+          <p:cNvPr id="31" name="Text 29"/>
           <p:cNvSpPr/>
           <p:nvPr/>
         </p:nvSpPr>
@@ -9274,7 +9835,7 @@
       </p:sp>
       <p:sp>
         <p:nvSpPr>
-          <p:cNvPr id="8" name="Text 5"/>
+          <p:cNvPr id="32" name="Text 30"/>
           <p:cNvSpPr/>
           <p:nvPr/>
         </p:nvSpPr>
@@ -9316,7 +9877,7 @@
       </p:sp>
       <p:sp>
         <p:nvSpPr>
-          <p:cNvPr id="9" name="Text 6"/>
+          <p:cNvPr id="33" name="Text 31"/>
           <p:cNvSpPr/>
           <p:nvPr/>
         </p:nvSpPr>
@@ -9355,7 +9916,7 @@
       </p:sp>
       <p:sp>
         <p:nvSpPr>
-          <p:cNvPr id="10" name="Text 7"/>
+          <p:cNvPr id="34" name="Text 32"/>
           <p:cNvSpPr/>
           <p:nvPr/>
         </p:nvSpPr>
@@ -9397,7 +9958,7 @@
       </p:sp>
       <p:sp>
         <p:nvSpPr>
-          <p:cNvPr id="11" name="Text 8"/>
+          <p:cNvPr id="35" name="Text 33"/>
           <p:cNvSpPr/>
           <p:nvPr/>
         </p:nvSpPr>
@@ -9436,7 +9997,7 @@
       </p:sp>
       <p:sp>
         <p:nvSpPr>
-          <p:cNvPr id="12" name="Text 9"/>
+          <p:cNvPr id="36" name="Text 34"/>
           <p:cNvSpPr/>
           <p:nvPr/>
         </p:nvSpPr>
@@ -9478,7 +10039,7 @@
       </p:sp>
       <p:sp>
         <p:nvSpPr>
-          <p:cNvPr id="13" name="Text 10"/>
+          <p:cNvPr id="37" name="Text 35"/>
           <p:cNvSpPr/>
           <p:nvPr/>
         </p:nvSpPr>
@@ -9517,7 +10078,7 @@
       </p:sp>
       <p:sp>
         <p:nvSpPr>
-          <p:cNvPr id="14" name="Text 11"/>
+          <p:cNvPr id="38" name="Text 36"/>
           <p:cNvSpPr/>
           <p:nvPr/>
         </p:nvSpPr>

--- a/apps/api/src/main/resources/static/proposal/fleetmind-proposal-deck.pptx
+++ b/apps/api/src/main/resources/static/proposal/fleetmind-proposal-deck.pptx
@@ -3543,7 +3543,7 @@
               <a:buNone/>
             </a:pPr>
             <a:r>
-              <a:rPr lang="en-US" sz="1600" b="1" dirty="0">
+              <a:rPr lang="en-US" sz="1500" b="1" dirty="0">
                 <a:solidFill>
                   <a:srgbClr val="0A2540"/>
                 </a:solidFill>
@@ -3551,9 +3551,37 @@
                 <a:ea typeface="Hiragino Sans" pitchFamily="34" charset="-122"/>
                 <a:cs typeface="Hiragino Sans" pitchFamily="34" charset="-120"/>
               </a:rPr>
-              <a:t>AI 的角色：數字來自計算，語言來自 AI，決策留給人</a:t>
-            </a:r>
-            <a:endParaRPr lang="en-US" sz="1600" dirty="0"/>
+              <a:t>AI 定位：Explainable Decision Support</a:t>
+            </a:r>
+            <a:pPr indent="0" marL="0">
+              <a:buNone/>
+            </a:pPr>
+            <a:r>
+              <a:rPr lang="en-US" sz="1500" b="1" dirty="0">
+                <a:solidFill>
+                  <a:srgbClr val="E76F51"/>
+                </a:solidFill>
+                <a:latin typeface="Hiragino Sans" pitchFamily="34" charset="0"/>
+                <a:ea typeface="Hiragino Sans" pitchFamily="34" charset="-122"/>
+                <a:cs typeface="Hiragino Sans" pitchFamily="34" charset="-120"/>
+              </a:rPr>
+              <a:t>，不是 Prediction Engine</a:t>
+            </a:r>
+            <a:pPr indent="0" marL="0">
+              <a:buNone/>
+            </a:pPr>
+            <a:r>
+              <a:rPr lang="en-US" sz="1500" b="1" dirty="0">
+                <a:solidFill>
+                  <a:srgbClr val="0A2540"/>
+                </a:solidFill>
+                <a:latin typeface="Hiragino Sans" pitchFamily="34" charset="0"/>
+                <a:ea typeface="Hiragino Sans" pitchFamily="34" charset="-122"/>
+                <a:cs typeface="Hiragino Sans" pitchFamily="34" charset="-120"/>
+              </a:rPr>
+              <a:t> —— 數字來自計算，語言來自 AI，工程師拍板。</a:t>
+            </a:r>
+            <a:endParaRPr lang="en-US" sz="1500" dirty="0"/>
           </a:p>
         </p:txBody>
       </p:sp>
@@ -10444,8 +10472,8 @@
         </p:nvSpPr>
         <p:spPr>
           <a:xfrm>
-            <a:off x="960120" y="4754880"/>
-            <a:ext cx="4480560" cy="914400"/>
+            <a:off x="960120" y="4572000"/>
+            <a:ext cx="4526280" cy="1417320"/>
           </a:xfrm>
           <a:prstGeom prst="rect">
             <a:avLst/>
@@ -10459,12 +10487,38 @@
           <a:p>
             <a:pPr indent="0" marL="0">
               <a:lnSpc>
-                <a:spcPct val="112000"/>
+                <a:spcPct val="114000"/>
               </a:lnSpc>
-              <a:buNone/>
-            </a:pPr>
-            <a:r>
-              <a:rPr lang="en-US" sz="1100" dirty="0">
+              <a:spcAft>
+                <a:spcPts val="300"/>
+              </a:spcAft>
+              <a:buNone/>
+            </a:pPr>
+            <a:r>
+              <a:rPr lang="en-US" sz="1050" b="1" dirty="0">
+                <a:solidFill>
+                  <a:srgbClr val="F4A72B"/>
+                </a:solidFill>
+                <a:latin typeface="Hiragino Sans" pitchFamily="34" charset="0"/>
+                <a:ea typeface="Hiragino Sans" pitchFamily="34" charset="-122"/>
+                <a:cs typeface="Hiragino Sans" pitchFamily="34" charset="-120"/>
+              </a:rPr>
+              <a:t>為何歸因船殼？</a:t>
+            </a:r>
+            <a:endParaRPr lang="en-US" sz="1050" dirty="0"/>
+          </a:p>
+          <a:p>
+            <a:pPr indent="0" marL="0">
+              <a:lnSpc>
+                <a:spcPct val="114000"/>
+              </a:lnSpc>
+              <a:spcAft>
+                <a:spcPts val="300"/>
+              </a:spcAft>
+              <a:buNone/>
+            </a:pPr>
+            <a:r>
+              <a:rPr lang="en-US" sz="1050" dirty="0">
                 <a:solidFill>
                   <a:srgbClr val="8FA8BD"/>
                 </a:solidFill>
@@ -10472,9 +10526,29 @@
                 <a:ea typeface="Hiragino Sans" pitchFamily="34" charset="-122"/>
                 <a:cs typeface="Hiragino Sans" pitchFamily="34" charset="-120"/>
               </a:rPr>
-              <a:t>方法：以隔離區段（只影響螺旋槳 / 只影響船殼的窗口）各自量 k 漂移率拆分；區段稀疏時退回標記過的 50/50，不假裝精準。</a:t>
-            </a:r>
-            <a:endParaRPr lang="en-US" sz="1100" dirty="0"/>
+              <a:t>單靠 Noon Report 無法物理拆分海流／天氣／引擎老化；我們以 Speed Loss 與維修事件的時間關聯推估主因，並用隔離區段量 k 漂移率拆船殼／螺旋槳（區段稀疏時退回標記過的 50/50，不假裝精準）。</a:t>
+            </a:r>
+            <a:endParaRPr lang="en-US" sz="1050" dirty="0"/>
+          </a:p>
+          <a:p>
+            <a:pPr indent="0" marL="0">
+              <a:lnSpc>
+                <a:spcPct val="114000"/>
+              </a:lnSpc>
+              <a:buNone/>
+            </a:pPr>
+            <a:r>
+              <a:rPr lang="en-US" sz="1050" dirty="0">
+                <a:solidFill>
+                  <a:srgbClr val="2A9D8F"/>
+                </a:solidFill>
+                <a:latin typeface="Hiragino Sans" pitchFamily="34" charset="0"/>
+                <a:ea typeface="Hiragino Sans" pitchFamily="34" charset="-122"/>
+                <a:cs typeface="Hiragino Sans" pitchFamily="34" charset="-120"/>
+              </a:rPr>
+              <a:t>給更多感測資料（天氣／扭矩／軸功率）→ 可升級為真正的 Attribution Model。</a:t>
+            </a:r>
+            <a:endParaRPr lang="en-US" sz="1050" dirty="0"/>
           </a:p>
         </p:txBody>
       </p:sp>
